--- a/data-eng/decks/w4d3s4.pptx
+++ b/data-eng/decks/w4d3s4.pptx
@@ -15,6 +15,7 @@
     <p:sldId id="263" r:id="rId14"/>
     <p:sldId id="264" r:id="rId15"/>
     <p:sldId id="265" r:id="rId16"/>
+    <p:sldId id="266" r:id="rId17"/>
   </p:sldIdLst>
   <p:sldSz cx="18288000" cy="10287000" type="screen4x3"/>
   <p:notesSz cx="6858000" cy="9144000"/>
@@ -3099,7 +3100,7 @@
       <p:grpSpPr/>
       <p:sp>
         <p:nvSpPr>
-          <p:cNvPr id="2" name="Oval 1"/>
+          <p:cNvPr id="2" name="deckgen:decor"/>
           <p:cNvSpPr/>
           <p:nvPr/>
         </p:nvSpPr>
@@ -3129,7 +3130,7 @@
       </p:sp>
       <p:sp>
         <p:nvSpPr>
-          <p:cNvPr id="3" name="Oval 2"/>
+          <p:cNvPr id="3" name="deckgen:decor"/>
           <p:cNvSpPr/>
           <p:nvPr/>
         </p:nvSpPr>
@@ -3159,7 +3160,7 @@
       </p:sp>
       <p:sp>
         <p:nvSpPr>
-          <p:cNvPr id="4" name="Oval 3"/>
+          <p:cNvPr id="4" name="deckgen:decor"/>
           <p:cNvSpPr/>
           <p:nvPr/>
         </p:nvSpPr>
@@ -3189,7 +3190,7 @@
       </p:sp>
       <p:sp>
         <p:nvSpPr>
-          <p:cNvPr id="5" name="Rectangle 4"/>
+          <p:cNvPr id="5" name="deckgen:decor"/>
           <p:cNvSpPr/>
           <p:nvPr/>
         </p:nvSpPr>
@@ -3219,7 +3220,7 @@
       </p:sp>
       <p:sp>
         <p:nvSpPr>
-          <p:cNvPr id="6" name="Oval 5"/>
+          <p:cNvPr id="6" name="deckgen:decor"/>
           <p:cNvSpPr/>
           <p:nvPr/>
         </p:nvSpPr>
@@ -3249,7 +3250,7 @@
       </p:sp>
       <p:sp>
         <p:nvSpPr>
-          <p:cNvPr id="7" name="Oval 6"/>
+          <p:cNvPr id="7" name="deckgen:decor"/>
           <p:cNvSpPr/>
           <p:nvPr/>
         </p:nvSpPr>
@@ -3279,7 +3280,7 @@
       </p:sp>
       <p:sp>
         <p:nvSpPr>
-          <p:cNvPr id="8" name="Oval 7"/>
+          <p:cNvPr id="8" name="deckgen:decor"/>
           <p:cNvSpPr/>
           <p:nvPr/>
         </p:nvSpPr>
@@ -3309,7 +3310,7 @@
       </p:sp>
       <p:sp>
         <p:nvSpPr>
-          <p:cNvPr id="9" name="Oval 8"/>
+          <p:cNvPr id="9" name="deckgen:decor"/>
           <p:cNvSpPr/>
           <p:nvPr/>
         </p:nvSpPr>
@@ -3339,7 +3340,7 @@
       </p:sp>
       <p:sp>
         <p:nvSpPr>
-          <p:cNvPr id="10" name="Rectangle 9"/>
+          <p:cNvPr id="10" name="deckgen:decor"/>
           <p:cNvSpPr/>
           <p:nvPr/>
         </p:nvSpPr>
@@ -3599,7 +3600,1150 @@
       <p:grpSpPr/>
       <p:sp>
         <p:nvSpPr>
-          <p:cNvPr id="2" name="Oval 1"/>
+          <p:cNvPr id="2" name="deckgen:decor"/>
+          <p:cNvSpPr/>
+          <p:nvPr/>
+        </p:nvSpPr>
+        <p:spPr>
+          <a:xfrm>
+            <a:off x="15811500" y="8382000"/>
+            <a:ext cx="4953000" cy="4953000"/>
+          </a:xfrm>
+          <a:prstGeom prst="ellipse">
+            <a:avLst/>
+          </a:prstGeom>
+          <a:solidFill>
+            <a:srgbClr val="F3F6FC"/>
+          </a:solidFill>
+          <a:ln>
+            <a:noFill/>
+          </a:ln>
+          <a:effectLst/>
+        </p:spPr>
+        <p:txBody>
+          <a:bodyPr rtlCol="0" anchor="ctr" wrap="square"/>
+          <a:lstStyle/>
+          <a:p>
+            <a:pPr algn="ctr"/>
+          </a:p>
+        </p:txBody>
+      </p:sp>
+      <p:sp>
+        <p:nvSpPr>
+          <p:cNvPr id="3" name="deckgen:decor"/>
+          <p:cNvSpPr/>
+          <p:nvPr/>
+        </p:nvSpPr>
+        <p:spPr>
+          <a:xfrm>
+            <a:off x="16859250" y="9429750"/>
+            <a:ext cx="2857500" cy="2857500"/>
+          </a:xfrm>
+          <a:prstGeom prst="ellipse">
+            <a:avLst/>
+          </a:prstGeom>
+          <a:solidFill>
+            <a:srgbClr val="FFFFFF"/>
+          </a:solidFill>
+          <a:ln>
+            <a:noFill/>
+          </a:ln>
+          <a:effectLst/>
+        </p:spPr>
+        <p:txBody>
+          <a:bodyPr rtlCol="0" anchor="ctr" wrap="square"/>
+          <a:lstStyle/>
+          <a:p>
+            <a:pPr algn="ctr"/>
+          </a:p>
+        </p:txBody>
+      </p:sp>
+      <p:sp>
+        <p:nvSpPr>
+          <p:cNvPr id="4" name="deckgen:decor"/>
+          <p:cNvSpPr/>
+          <p:nvPr/>
+        </p:nvSpPr>
+        <p:spPr>
+          <a:xfrm>
+            <a:off x="-1428750" y="1428750"/>
+            <a:ext cx="2857500" cy="2857500"/>
+          </a:xfrm>
+          <a:prstGeom prst="ellipse">
+            <a:avLst/>
+          </a:prstGeom>
+          <a:solidFill>
+            <a:srgbClr val="F7F8FA"/>
+          </a:solidFill>
+          <a:ln>
+            <a:noFill/>
+          </a:ln>
+          <a:effectLst/>
+        </p:spPr>
+        <p:txBody>
+          <a:bodyPr rtlCol="0" anchor="ctr" wrap="square"/>
+          <a:lstStyle/>
+          <a:p>
+            <a:pPr algn="ctr"/>
+          </a:p>
+        </p:txBody>
+      </p:sp>
+      <p:sp>
+        <p:nvSpPr>
+          <p:cNvPr id="5" name="TextBox 4"/>
+          <p:cNvSpPr txBox="1"/>
+          <p:nvPr/>
+        </p:nvSpPr>
+        <p:spPr>
+          <a:xfrm>
+            <a:off x="1143000" y="838200"/>
+            <a:ext cx="16002000" cy="342900"/>
+          </a:xfrm>
+          <a:prstGeom prst="rect">
+            <a:avLst/>
+          </a:prstGeom>
+          <a:noFill/>
+        </p:spPr>
+        <p:txBody>
+          <a:bodyPr wrap="square" lIns="0" rIns="0" tIns="0" bIns="0" anchor="t">
+            <a:spAutoFit/>
+          </a:bodyPr>
+          <a:lstStyle/>
+          <a:p>
+            <a:pPr algn="l">
+              <a:lnSpc>
+                <a:spcPct val="100000"/>
+              </a:lnSpc>
+            </a:pPr>
+            <a:r>
+              <a:rPr sz="1950" b="1" spc="160">
+                <a:solidFill>
+                  <a:srgbClr val="1E5BC6"/>
+                </a:solidFill>
+                <a:latin typeface="Pretendard"/>
+                <a:ea typeface="Pretendard"/>
+                <a:cs typeface="Pretendard"/>
+              </a:rPr>
+              <a:t>다음 회차 예고 · 10-21(수)</a:t>
+            </a:r>
+          </a:p>
+        </p:txBody>
+      </p:sp>
+      <p:sp>
+        <p:nvSpPr>
+          <p:cNvPr id="6" name="TextBox 5"/>
+          <p:cNvSpPr txBox="1"/>
+          <p:nvPr/>
+        </p:nvSpPr>
+        <p:spPr>
+          <a:xfrm>
+            <a:off x="1143000" y="1162050"/>
+            <a:ext cx="16002000" cy="762000"/>
+          </a:xfrm>
+          <a:prstGeom prst="rect">
+            <a:avLst/>
+          </a:prstGeom>
+          <a:noFill/>
+        </p:spPr>
+        <p:txBody>
+          <a:bodyPr wrap="square" lIns="0" rIns="0" tIns="0" bIns="0" anchor="t">
+            <a:spAutoFit/>
+          </a:bodyPr>
+          <a:lstStyle/>
+          <a:p>
+            <a:pPr algn="l">
+              <a:lnSpc>
+                <a:spcPct val="100000"/>
+              </a:lnSpc>
+            </a:pPr>
+            <a:r>
+              <a:rPr sz="5100" b="1">
+                <a:solidFill>
+                  <a:srgbClr val="0D2B5E"/>
+                </a:solidFill>
+                <a:latin typeface="Pretendard"/>
+                <a:ea typeface="Pretendard"/>
+                <a:cs typeface="Pretendard"/>
+              </a:rPr>
+              <a:t>4-4 · Trino 기반 S3 SQL 엔진 구축</a:t>
+            </a:r>
+          </a:p>
+        </p:txBody>
+      </p:sp>
+      <p:sp>
+        <p:nvSpPr>
+          <p:cNvPr id="7" name="Rectangle 6"/>
+          <p:cNvSpPr/>
+          <p:nvPr/>
+        </p:nvSpPr>
+        <p:spPr>
+          <a:xfrm>
+            <a:off x="1143000" y="2038350"/>
+            <a:ext cx="16002000" cy="28575"/>
+          </a:xfrm>
+          <a:prstGeom prst="rect">
+            <a:avLst/>
+          </a:prstGeom>
+          <a:solidFill>
+            <a:srgbClr val="0D2B5E"/>
+          </a:solidFill>
+          <a:ln>
+            <a:noFill/>
+          </a:ln>
+          <a:effectLst/>
+        </p:spPr>
+        <p:txBody>
+          <a:bodyPr rtlCol="0" anchor="ctr" wrap="square"/>
+          <a:lstStyle/>
+          <a:p>
+            <a:pPr algn="ctr"/>
+          </a:p>
+        </p:txBody>
+      </p:sp>
+      <p:sp>
+        <p:nvSpPr>
+          <p:cNvPr id="8" name="Rounded Rectangle 7"/>
+          <p:cNvSpPr/>
+          <p:nvPr/>
+        </p:nvSpPr>
+        <p:spPr>
+          <a:xfrm>
+            <a:off x="1143000" y="3429000"/>
+            <a:ext cx="3714750" cy="2476500"/>
+          </a:xfrm>
+          <a:prstGeom prst="roundRect">
+            <a:avLst>
+              <a:gd name="adj" fmla="val 1923"/>
+            </a:avLst>
+          </a:prstGeom>
+          <a:solidFill>
+            <a:srgbClr val="FAFBFD"/>
+          </a:solidFill>
+          <a:ln w="9525">
+            <a:solidFill>
+              <a:srgbClr val="DCE1E8"/>
+            </a:solidFill>
+          </a:ln>
+          <a:effectLst/>
+        </p:spPr>
+        <p:txBody>
+          <a:bodyPr rtlCol="0" anchor="ctr" wrap="square"/>
+          <a:lstStyle/>
+          <a:p>
+            <a:pPr algn="ctr"/>
+          </a:p>
+        </p:txBody>
+      </p:sp>
+      <p:sp>
+        <p:nvSpPr>
+          <p:cNvPr id="9" name="Rectangle 8"/>
+          <p:cNvSpPr/>
+          <p:nvPr/>
+        </p:nvSpPr>
+        <p:spPr>
+          <a:xfrm>
+            <a:off x="1143000" y="3429000"/>
+            <a:ext cx="3714750" cy="47625"/>
+          </a:xfrm>
+          <a:prstGeom prst="rect">
+            <a:avLst/>
+          </a:prstGeom>
+          <a:solidFill>
+            <a:srgbClr val="1E5BC6"/>
+          </a:solidFill>
+          <a:ln>
+            <a:noFill/>
+          </a:ln>
+          <a:effectLst/>
+        </p:spPr>
+        <p:txBody>
+          <a:bodyPr rtlCol="0" anchor="ctr" wrap="square"/>
+          <a:lstStyle/>
+          <a:p>
+            <a:pPr algn="ctr"/>
+          </a:p>
+        </p:txBody>
+      </p:sp>
+      <p:sp>
+        <p:nvSpPr>
+          <p:cNvPr id="10" name="deckgen:ornament"/>
+          <p:cNvSpPr txBox="1"/>
+          <p:nvPr/>
+        </p:nvSpPr>
+        <p:spPr>
+          <a:xfrm>
+            <a:off x="4000500" y="3638550"/>
+            <a:ext cx="590550" cy="400050"/>
+          </a:xfrm>
+          <a:prstGeom prst="rect">
+            <a:avLst/>
+          </a:prstGeom>
+          <a:noFill/>
+        </p:spPr>
+        <p:txBody>
+          <a:bodyPr wrap="square" lIns="0" rIns="0" tIns="0" bIns="0" anchor="t">
+            <a:spAutoFit/>
+          </a:bodyPr>
+          <a:lstStyle/>
+          <a:p>
+            <a:pPr algn="r">
+              <a:lnSpc>
+                <a:spcPct val="100000"/>
+              </a:lnSpc>
+            </a:pPr>
+            <a:r>
+              <a:rPr sz="2550" b="1">
+                <a:solidFill>
+                  <a:srgbClr val="E4EBF4"/>
+                </a:solidFill>
+                <a:latin typeface="Pretendard"/>
+                <a:ea typeface="Pretendard"/>
+                <a:cs typeface="Pretendard"/>
+              </a:rPr>
+              <a:t>01</a:t>
+            </a:r>
+          </a:p>
+        </p:txBody>
+      </p:sp>
+      <p:sp>
+        <p:nvSpPr>
+          <p:cNvPr id="11" name="TextBox 10"/>
+          <p:cNvSpPr txBox="1"/>
+          <p:nvPr/>
+        </p:nvSpPr>
+        <p:spPr>
+          <a:xfrm>
+            <a:off x="1466850" y="3752850"/>
+            <a:ext cx="3067050" cy="1828800"/>
+          </a:xfrm>
+          <a:prstGeom prst="rect">
+            <a:avLst/>
+          </a:prstGeom>
+          <a:noFill/>
+        </p:spPr>
+        <p:txBody>
+          <a:bodyPr wrap="square" lIns="0" rIns="0" tIns="0" bIns="0" anchor="ctr">
+            <a:spAutoFit/>
+          </a:bodyPr>
+          <a:lstStyle/>
+          <a:p>
+            <a:pPr>
+              <a:lnSpc>
+                <a:spcPct val="115000"/>
+              </a:lnSpc>
+            </a:pPr>
+            <a:r>
+              <a:rPr sz="2700" b="1">
+                <a:solidFill>
+                  <a:srgbClr val="0D2B5E"/>
+                </a:solidFill>
+                <a:latin typeface="Pretendard"/>
+                <a:ea typeface="Pretendard"/>
+                <a:cs typeface="Pretendard"/>
+              </a:rPr>
+              <a:t>이론 1H</a:t>
+            </a:r>
+          </a:p>
+          <a:p>
+            <a:pPr>
+              <a:lnSpc>
+                <a:spcPct val="146000"/>
+              </a:lnSpc>
+              <a:spcBef>
+                <a:spcPts val="1050"/>
+              </a:spcBef>
+            </a:pPr>
+            <a:r>
+              <a:rPr sz="2025" b="0">
+                <a:solidFill>
+                  <a:srgbClr val="3D3D3D"/>
+                </a:solidFill>
+                <a:latin typeface="Pretendard"/>
+                <a:ea typeface="Pretendard"/>
+                <a:cs typeface="Pretendard"/>
+              </a:rPr>
+              <a:t>분산 SQL 엔진의 이해</a:t>
+            </a:r>
+          </a:p>
+          <a:p>
+            <a:pPr>
+              <a:lnSpc>
+                <a:spcPct val="146000"/>
+              </a:lnSpc>
+            </a:pPr>
+            <a:r>
+              <a:rPr sz="2025" b="0">
+                <a:solidFill>
+                  <a:srgbClr val="3D3D3D"/>
+                </a:solidFill>
+                <a:latin typeface="Pretendard"/>
+                <a:ea typeface="Pretendard"/>
+                <a:cs typeface="Pretendard"/>
+              </a:rPr>
+              <a:t>코디네이터·워커</a:t>
+            </a:r>
+          </a:p>
+        </p:txBody>
+      </p:sp>
+      <p:sp>
+        <p:nvSpPr>
+          <p:cNvPr id="12" name="Rounded Rectangle 11"/>
+          <p:cNvSpPr/>
+          <p:nvPr/>
+        </p:nvSpPr>
+        <p:spPr>
+          <a:xfrm>
+            <a:off x="5238750" y="3429000"/>
+            <a:ext cx="3714750" cy="2476500"/>
+          </a:xfrm>
+          <a:prstGeom prst="roundRect">
+            <a:avLst>
+              <a:gd name="adj" fmla="val 1923"/>
+            </a:avLst>
+          </a:prstGeom>
+          <a:solidFill>
+            <a:srgbClr val="0D2B5E"/>
+          </a:solidFill>
+          <a:ln w="9525">
+            <a:solidFill>
+              <a:srgbClr val="0D2B5E"/>
+            </a:solidFill>
+          </a:ln>
+          <a:effectLst/>
+        </p:spPr>
+        <p:txBody>
+          <a:bodyPr rtlCol="0" anchor="ctr" wrap="square"/>
+          <a:lstStyle/>
+          <a:p>
+            <a:pPr algn="ctr"/>
+          </a:p>
+        </p:txBody>
+      </p:sp>
+      <p:sp>
+        <p:nvSpPr>
+          <p:cNvPr id="13" name="Rectangle 12"/>
+          <p:cNvSpPr/>
+          <p:nvPr/>
+        </p:nvSpPr>
+        <p:spPr>
+          <a:xfrm>
+            <a:off x="5238750" y="3429000"/>
+            <a:ext cx="3714750" cy="47625"/>
+          </a:xfrm>
+          <a:prstGeom prst="rect">
+            <a:avLst/>
+          </a:prstGeom>
+          <a:solidFill>
+            <a:srgbClr val="1E5BC6"/>
+          </a:solidFill>
+          <a:ln>
+            <a:noFill/>
+          </a:ln>
+          <a:effectLst/>
+        </p:spPr>
+        <p:txBody>
+          <a:bodyPr rtlCol="0" anchor="ctr" wrap="square"/>
+          <a:lstStyle/>
+          <a:p>
+            <a:pPr algn="ctr"/>
+          </a:p>
+        </p:txBody>
+      </p:sp>
+      <p:sp>
+        <p:nvSpPr>
+          <p:cNvPr id="14" name="deckgen:ornament"/>
+          <p:cNvSpPr txBox="1"/>
+          <p:nvPr/>
+        </p:nvSpPr>
+        <p:spPr>
+          <a:xfrm>
+            <a:off x="8096250" y="3638550"/>
+            <a:ext cx="590550" cy="400050"/>
+          </a:xfrm>
+          <a:prstGeom prst="rect">
+            <a:avLst/>
+          </a:prstGeom>
+          <a:noFill/>
+        </p:spPr>
+        <p:txBody>
+          <a:bodyPr wrap="square" lIns="0" rIns="0" tIns="0" bIns="0" anchor="t">
+            <a:spAutoFit/>
+          </a:bodyPr>
+          <a:lstStyle/>
+          <a:p>
+            <a:pPr algn="r">
+              <a:lnSpc>
+                <a:spcPct val="100000"/>
+              </a:lnSpc>
+            </a:pPr>
+            <a:r>
+              <a:rPr sz="2550" b="1">
+                <a:solidFill>
+                  <a:srgbClr val="3B4B7C"/>
+                </a:solidFill>
+                <a:latin typeface="Pretendard"/>
+                <a:ea typeface="Pretendard"/>
+                <a:cs typeface="Pretendard"/>
+              </a:rPr>
+              <a:t>02</a:t>
+            </a:r>
+          </a:p>
+        </p:txBody>
+      </p:sp>
+      <p:sp>
+        <p:nvSpPr>
+          <p:cNvPr id="15" name="TextBox 14"/>
+          <p:cNvSpPr txBox="1"/>
+          <p:nvPr/>
+        </p:nvSpPr>
+        <p:spPr>
+          <a:xfrm>
+            <a:off x="5562600" y="3752850"/>
+            <a:ext cx="3067050" cy="1828800"/>
+          </a:xfrm>
+          <a:prstGeom prst="rect">
+            <a:avLst/>
+          </a:prstGeom>
+          <a:noFill/>
+        </p:spPr>
+        <p:txBody>
+          <a:bodyPr wrap="square" lIns="0" rIns="0" tIns="0" bIns="0" anchor="ctr">
+            <a:spAutoFit/>
+          </a:bodyPr>
+          <a:lstStyle/>
+          <a:p>
+            <a:pPr>
+              <a:lnSpc>
+                <a:spcPct val="115000"/>
+              </a:lnSpc>
+            </a:pPr>
+            <a:r>
+              <a:rPr sz="2700" b="1">
+                <a:solidFill>
+                  <a:srgbClr val="FFFFFF"/>
+                </a:solidFill>
+                <a:latin typeface="Pretendard"/>
+                <a:ea typeface="Pretendard"/>
+                <a:cs typeface="Pretendard"/>
+              </a:rPr>
+              <a:t>실습 1.5H</a:t>
+            </a:r>
+          </a:p>
+          <a:p>
+            <a:pPr>
+              <a:lnSpc>
+                <a:spcPct val="146000"/>
+              </a:lnSpc>
+              <a:spcBef>
+                <a:spcPts val="1050"/>
+              </a:spcBef>
+            </a:pPr>
+            <a:r>
+              <a:rPr sz="2025" b="0">
+                <a:solidFill>
+                  <a:srgbClr val="D9E2F0"/>
+                </a:solidFill>
+                <a:latin typeface="Pretendard"/>
+                <a:ea typeface="Pretendard"/>
+                <a:cs typeface="Pretendard"/>
+              </a:rPr>
+              <a:t>Trino 컨테이너와</a:t>
+            </a:r>
+          </a:p>
+          <a:p>
+            <a:pPr>
+              <a:lnSpc>
+                <a:spcPct val="146000"/>
+              </a:lnSpc>
+            </a:pPr>
+            <a:r>
+              <a:rPr sz="2025" b="0">
+                <a:solidFill>
+                  <a:srgbClr val="D9E2F0"/>
+                </a:solidFill>
+                <a:latin typeface="Pretendard"/>
+                <a:ea typeface="Pretendard"/>
+                <a:cs typeface="Pretendard"/>
+              </a:rPr>
+              <a:t>카탈로그 연결</a:t>
+            </a:r>
+          </a:p>
+        </p:txBody>
+      </p:sp>
+      <p:sp>
+        <p:nvSpPr>
+          <p:cNvPr id="16" name="Rounded Rectangle 15"/>
+          <p:cNvSpPr/>
+          <p:nvPr/>
+        </p:nvSpPr>
+        <p:spPr>
+          <a:xfrm>
+            <a:off x="9334500" y="3429000"/>
+            <a:ext cx="3714750" cy="2476500"/>
+          </a:xfrm>
+          <a:prstGeom prst="roundRect">
+            <a:avLst>
+              <a:gd name="adj" fmla="val 1923"/>
+            </a:avLst>
+          </a:prstGeom>
+          <a:solidFill>
+            <a:srgbClr val="FAFBFD"/>
+          </a:solidFill>
+          <a:ln w="9525">
+            <a:solidFill>
+              <a:srgbClr val="DCE1E8"/>
+            </a:solidFill>
+          </a:ln>
+          <a:effectLst/>
+        </p:spPr>
+        <p:txBody>
+          <a:bodyPr rtlCol="0" anchor="ctr" wrap="square"/>
+          <a:lstStyle/>
+          <a:p>
+            <a:pPr algn="ctr"/>
+          </a:p>
+        </p:txBody>
+      </p:sp>
+      <p:sp>
+        <p:nvSpPr>
+          <p:cNvPr id="17" name="Rectangle 16"/>
+          <p:cNvSpPr/>
+          <p:nvPr/>
+        </p:nvSpPr>
+        <p:spPr>
+          <a:xfrm>
+            <a:off x="9334500" y="3429000"/>
+            <a:ext cx="3714750" cy="47625"/>
+          </a:xfrm>
+          <a:prstGeom prst="rect">
+            <a:avLst/>
+          </a:prstGeom>
+          <a:solidFill>
+            <a:srgbClr val="1E5BC6"/>
+          </a:solidFill>
+          <a:ln>
+            <a:noFill/>
+          </a:ln>
+          <a:effectLst/>
+        </p:spPr>
+        <p:txBody>
+          <a:bodyPr rtlCol="0" anchor="ctr" wrap="square"/>
+          <a:lstStyle/>
+          <a:p>
+            <a:pPr algn="ctr"/>
+          </a:p>
+        </p:txBody>
+      </p:sp>
+      <p:sp>
+        <p:nvSpPr>
+          <p:cNvPr id="18" name="deckgen:ornament"/>
+          <p:cNvSpPr txBox="1"/>
+          <p:nvPr/>
+        </p:nvSpPr>
+        <p:spPr>
+          <a:xfrm>
+            <a:off x="12192000" y="3638550"/>
+            <a:ext cx="590550" cy="400050"/>
+          </a:xfrm>
+          <a:prstGeom prst="rect">
+            <a:avLst/>
+          </a:prstGeom>
+          <a:noFill/>
+        </p:spPr>
+        <p:txBody>
+          <a:bodyPr wrap="square" lIns="0" rIns="0" tIns="0" bIns="0" anchor="t">
+            <a:spAutoFit/>
+          </a:bodyPr>
+          <a:lstStyle/>
+          <a:p>
+            <a:pPr algn="r">
+              <a:lnSpc>
+                <a:spcPct val="100000"/>
+              </a:lnSpc>
+            </a:pPr>
+            <a:r>
+              <a:rPr sz="2550" b="1">
+                <a:solidFill>
+                  <a:srgbClr val="E4EBF4"/>
+                </a:solidFill>
+                <a:latin typeface="Pretendard"/>
+                <a:ea typeface="Pretendard"/>
+                <a:cs typeface="Pretendard"/>
+              </a:rPr>
+              <a:t>03</a:t>
+            </a:r>
+          </a:p>
+        </p:txBody>
+      </p:sp>
+      <p:sp>
+        <p:nvSpPr>
+          <p:cNvPr id="19" name="TextBox 18"/>
+          <p:cNvSpPr txBox="1"/>
+          <p:nvPr/>
+        </p:nvSpPr>
+        <p:spPr>
+          <a:xfrm>
+            <a:off x="9658350" y="3752850"/>
+            <a:ext cx="3067050" cy="1828800"/>
+          </a:xfrm>
+          <a:prstGeom prst="rect">
+            <a:avLst/>
+          </a:prstGeom>
+          <a:noFill/>
+        </p:spPr>
+        <p:txBody>
+          <a:bodyPr wrap="square" lIns="0" rIns="0" tIns="0" bIns="0" anchor="ctr">
+            <a:spAutoFit/>
+          </a:bodyPr>
+          <a:lstStyle/>
+          <a:p>
+            <a:pPr>
+              <a:lnSpc>
+                <a:spcPct val="115000"/>
+              </a:lnSpc>
+            </a:pPr>
+            <a:r>
+              <a:rPr sz="2700" b="1">
+                <a:solidFill>
+                  <a:srgbClr val="0D2B5E"/>
+                </a:solidFill>
+                <a:latin typeface="Pretendard"/>
+                <a:ea typeface="Pretendard"/>
+                <a:cs typeface="Pretendard"/>
+              </a:rPr>
+              <a:t>실습 1H</a:t>
+            </a:r>
+          </a:p>
+          <a:p>
+            <a:pPr>
+              <a:lnSpc>
+                <a:spcPct val="146000"/>
+              </a:lnSpc>
+              <a:spcBef>
+                <a:spcPts val="1050"/>
+              </a:spcBef>
+            </a:pPr>
+            <a:r>
+              <a:rPr sz="2025" b="0">
+                <a:solidFill>
+                  <a:srgbClr val="3D3D3D"/>
+                </a:solidFill>
+                <a:latin typeface="Pretendard"/>
+                <a:ea typeface="Pretendard"/>
+                <a:cs typeface="Pretendard"/>
+              </a:rPr>
+              <a:t>Trino SQL 실습</a:t>
+            </a:r>
+          </a:p>
+          <a:p>
+            <a:pPr>
+              <a:lnSpc>
+                <a:spcPct val="146000"/>
+              </a:lnSpc>
+            </a:pPr>
+            <a:r>
+              <a:rPr sz="2025" b="0">
+                <a:solidFill>
+                  <a:srgbClr val="3D3D3D"/>
+                </a:solidFill>
+                <a:latin typeface="Pretendard"/>
+                <a:ea typeface="Pretendard"/>
+                <a:cs typeface="Pretendard"/>
+              </a:rPr>
+              <a:t>집계·CTAS·타임 트래블</a:t>
+            </a:r>
+          </a:p>
+        </p:txBody>
+      </p:sp>
+      <p:sp>
+        <p:nvSpPr>
+          <p:cNvPr id="20" name="Rounded Rectangle 19"/>
+          <p:cNvSpPr/>
+          <p:nvPr/>
+        </p:nvSpPr>
+        <p:spPr>
+          <a:xfrm>
+            <a:off x="13430250" y="3429000"/>
+            <a:ext cx="3714750" cy="2476500"/>
+          </a:xfrm>
+          <a:prstGeom prst="roundRect">
+            <a:avLst>
+              <a:gd name="adj" fmla="val 1923"/>
+            </a:avLst>
+          </a:prstGeom>
+          <a:solidFill>
+            <a:srgbClr val="FAFBFD"/>
+          </a:solidFill>
+          <a:ln w="9525">
+            <a:solidFill>
+              <a:srgbClr val="DCE1E8"/>
+            </a:solidFill>
+          </a:ln>
+          <a:effectLst/>
+        </p:spPr>
+        <p:txBody>
+          <a:bodyPr rtlCol="0" anchor="ctr" wrap="square"/>
+          <a:lstStyle/>
+          <a:p>
+            <a:pPr algn="ctr"/>
+          </a:p>
+        </p:txBody>
+      </p:sp>
+      <p:sp>
+        <p:nvSpPr>
+          <p:cNvPr id="21" name="Rectangle 20"/>
+          <p:cNvSpPr/>
+          <p:nvPr/>
+        </p:nvSpPr>
+        <p:spPr>
+          <a:xfrm>
+            <a:off x="13430250" y="3429000"/>
+            <a:ext cx="3714750" cy="47625"/>
+          </a:xfrm>
+          <a:prstGeom prst="rect">
+            <a:avLst/>
+          </a:prstGeom>
+          <a:solidFill>
+            <a:srgbClr val="1E5BC6"/>
+          </a:solidFill>
+          <a:ln>
+            <a:noFill/>
+          </a:ln>
+          <a:effectLst/>
+        </p:spPr>
+        <p:txBody>
+          <a:bodyPr rtlCol="0" anchor="ctr" wrap="square"/>
+          <a:lstStyle/>
+          <a:p>
+            <a:pPr algn="ctr"/>
+          </a:p>
+        </p:txBody>
+      </p:sp>
+      <p:sp>
+        <p:nvSpPr>
+          <p:cNvPr id="22" name="deckgen:ornament"/>
+          <p:cNvSpPr txBox="1"/>
+          <p:nvPr/>
+        </p:nvSpPr>
+        <p:spPr>
+          <a:xfrm>
+            <a:off x="16287750" y="3638550"/>
+            <a:ext cx="590550" cy="400050"/>
+          </a:xfrm>
+          <a:prstGeom prst="rect">
+            <a:avLst/>
+          </a:prstGeom>
+          <a:noFill/>
+        </p:spPr>
+        <p:txBody>
+          <a:bodyPr wrap="square" lIns="0" rIns="0" tIns="0" bIns="0" anchor="t">
+            <a:spAutoFit/>
+          </a:bodyPr>
+          <a:lstStyle/>
+          <a:p>
+            <a:pPr algn="r">
+              <a:lnSpc>
+                <a:spcPct val="100000"/>
+              </a:lnSpc>
+            </a:pPr>
+            <a:r>
+              <a:rPr sz="2550" b="1">
+                <a:solidFill>
+                  <a:srgbClr val="E4EBF4"/>
+                </a:solidFill>
+                <a:latin typeface="Pretendard"/>
+                <a:ea typeface="Pretendard"/>
+                <a:cs typeface="Pretendard"/>
+              </a:rPr>
+              <a:t>04</a:t>
+            </a:r>
+          </a:p>
+        </p:txBody>
+      </p:sp>
+      <p:sp>
+        <p:nvSpPr>
+          <p:cNvPr id="23" name="TextBox 22"/>
+          <p:cNvSpPr txBox="1"/>
+          <p:nvPr/>
+        </p:nvSpPr>
+        <p:spPr>
+          <a:xfrm>
+            <a:off x="13754100" y="3752850"/>
+            <a:ext cx="3067050" cy="1828800"/>
+          </a:xfrm>
+          <a:prstGeom prst="rect">
+            <a:avLst/>
+          </a:prstGeom>
+          <a:noFill/>
+        </p:spPr>
+        <p:txBody>
+          <a:bodyPr wrap="square" lIns="0" rIns="0" tIns="0" bIns="0" anchor="ctr">
+            <a:spAutoFit/>
+          </a:bodyPr>
+          <a:lstStyle/>
+          <a:p>
+            <a:pPr>
+              <a:lnSpc>
+                <a:spcPct val="115000"/>
+              </a:lnSpc>
+            </a:pPr>
+            <a:r>
+              <a:rPr sz="2700" b="1">
+                <a:solidFill>
+                  <a:srgbClr val="0D2B5E"/>
+                </a:solidFill>
+                <a:latin typeface="Pretendard"/>
+                <a:ea typeface="Pretendard"/>
+                <a:cs typeface="Pretendard"/>
+              </a:rPr>
+              <a:t>정리 0.5H</a:t>
+            </a:r>
+          </a:p>
+          <a:p>
+            <a:pPr>
+              <a:lnSpc>
+                <a:spcPct val="146000"/>
+              </a:lnSpc>
+              <a:spcBef>
+                <a:spcPts val="1050"/>
+              </a:spcBef>
+            </a:pPr>
+            <a:r>
+              <a:rPr sz="2025" b="0">
+                <a:solidFill>
+                  <a:srgbClr val="3D3D3D"/>
+                </a:solidFill>
+                <a:latin typeface="Pretendard"/>
+                <a:ea typeface="Pretendard"/>
+                <a:cs typeface="Pretendard"/>
+              </a:rPr>
+              <a:t>오늘 배운 것을</a:t>
+            </a:r>
+          </a:p>
+          <a:p>
+            <a:pPr>
+              <a:lnSpc>
+                <a:spcPct val="146000"/>
+              </a:lnSpc>
+            </a:pPr>
+            <a:r>
+              <a:rPr sz="2025" b="0">
+                <a:solidFill>
+                  <a:srgbClr val="3D3D3D"/>
+                </a:solidFill>
+                <a:latin typeface="Pretendard"/>
+                <a:ea typeface="Pretendard"/>
+                <a:cs typeface="Pretendard"/>
+              </a:rPr>
+              <a:t>한 장으로</a:t>
+            </a:r>
+          </a:p>
+        </p:txBody>
+      </p:sp>
+      <p:sp>
+        <p:nvSpPr>
+          <p:cNvPr id="24" name="Rectangle 23"/>
+          <p:cNvSpPr/>
+          <p:nvPr/>
+        </p:nvSpPr>
+        <p:spPr>
+          <a:xfrm>
+            <a:off x="1143000" y="6496050"/>
+            <a:ext cx="47625" cy="723900"/>
+          </a:xfrm>
+          <a:prstGeom prst="rect">
+            <a:avLst/>
+          </a:prstGeom>
+          <a:solidFill>
+            <a:srgbClr val="1E5BC6"/>
+          </a:solidFill>
+          <a:ln>
+            <a:noFill/>
+          </a:ln>
+          <a:effectLst/>
+        </p:spPr>
+        <p:txBody>
+          <a:bodyPr rtlCol="0" anchor="ctr" wrap="square"/>
+          <a:lstStyle/>
+          <a:p>
+            <a:pPr algn="ctr"/>
+          </a:p>
+        </p:txBody>
+      </p:sp>
+      <p:sp>
+        <p:nvSpPr>
+          <p:cNvPr id="25" name="TextBox 24"/>
+          <p:cNvSpPr txBox="1"/>
+          <p:nvPr/>
+        </p:nvSpPr>
+        <p:spPr>
+          <a:xfrm>
+            <a:off x="1390650" y="6553200"/>
+            <a:ext cx="15754350" cy="762000"/>
+          </a:xfrm>
+          <a:prstGeom prst="rect">
+            <a:avLst/>
+          </a:prstGeom>
+          <a:noFill/>
+        </p:spPr>
+        <p:txBody>
+          <a:bodyPr wrap="square" lIns="0" rIns="0" tIns="0" bIns="0" anchor="t">
+            <a:spAutoFit/>
+          </a:bodyPr>
+          <a:lstStyle/>
+          <a:p>
+            <a:pPr algn="l">
+              <a:lnSpc>
+                <a:spcPct val="150000"/>
+              </a:lnSpc>
+            </a:pPr>
+            <a:r>
+              <a:rPr sz="2025" b="1">
+                <a:solidFill>
+                  <a:srgbClr val="7D7D7D"/>
+                </a:solidFill>
+                <a:latin typeface="Pretendard"/>
+                <a:ea typeface="Pretendard"/>
+                <a:cs typeface="Pretendard"/>
+              </a:rPr>
+              <a:t>준비: 4개 컨테이너 up · orders 6행 확인 · 8080 포트 비우기 · docker pull trinodb/trino 미리</a:t>
+            </a:r>
+          </a:p>
+        </p:txBody>
+      </p:sp>
+      <p:sp>
+        <p:nvSpPr>
+          <p:cNvPr id="26" name="Rectangle 25"/>
+          <p:cNvSpPr/>
+          <p:nvPr/>
+        </p:nvSpPr>
+        <p:spPr>
+          <a:xfrm>
+            <a:off x="1143000" y="8058150"/>
+            <a:ext cx="16002000" cy="9525"/>
+          </a:xfrm>
+          <a:prstGeom prst="rect">
+            <a:avLst/>
+          </a:prstGeom>
+          <a:solidFill>
+            <a:srgbClr val="DCE1E8"/>
+          </a:solidFill>
+          <a:ln>
+            <a:noFill/>
+          </a:ln>
+          <a:effectLst/>
+        </p:spPr>
+        <p:txBody>
+          <a:bodyPr rtlCol="0" anchor="ctr" wrap="square"/>
+          <a:lstStyle/>
+          <a:p>
+            <a:pPr algn="ctr"/>
+          </a:p>
+        </p:txBody>
+      </p:sp>
+      <p:sp>
+        <p:nvSpPr>
+          <p:cNvPr id="27" name="TextBox 26"/>
+          <p:cNvSpPr txBox="1"/>
+          <p:nvPr/>
+        </p:nvSpPr>
+        <p:spPr>
+          <a:xfrm>
+            <a:off x="1143000" y="8248650"/>
+            <a:ext cx="13335000" cy="323850"/>
+          </a:xfrm>
+          <a:prstGeom prst="rect">
+            <a:avLst/>
+          </a:prstGeom>
+          <a:noFill/>
+        </p:spPr>
+        <p:txBody>
+          <a:bodyPr wrap="square" lIns="0" rIns="0" tIns="0" bIns="0" anchor="t">
+            <a:spAutoFit/>
+          </a:bodyPr>
+          <a:lstStyle/>
+          <a:p>
+            <a:pPr algn="l">
+              <a:lnSpc>
+                <a:spcPct val="100000"/>
+              </a:lnSpc>
+            </a:pPr>
+            <a:r>
+              <a:rPr sz="1725" b="0">
+                <a:solidFill>
+                  <a:srgbClr val="7D7D7D"/>
+                </a:solidFill>
+                <a:latin typeface="Pretendard"/>
+                <a:ea typeface="Pretendard"/>
+                <a:cs typeface="Pretendard"/>
+              </a:rPr>
+              <a:t>데이터 엔지니어링 &amp; RAG 파이프라인 160H · 4-3 · 정리·회고 0.5H</a:t>
+            </a:r>
+          </a:p>
+        </p:txBody>
+      </p:sp>
+      <p:sp>
+        <p:nvSpPr>
+          <p:cNvPr id="28" name="TextBox 27"/>
+          <p:cNvSpPr txBox="1"/>
+          <p:nvPr/>
+        </p:nvSpPr>
+        <p:spPr>
+          <a:xfrm>
+            <a:off x="15240000" y="8248650"/>
+            <a:ext cx="1905000" cy="323850"/>
+          </a:xfrm>
+          <a:prstGeom prst="rect">
+            <a:avLst/>
+          </a:prstGeom>
+          <a:noFill/>
+        </p:spPr>
+        <p:txBody>
+          <a:bodyPr wrap="square" lIns="0" rIns="0" tIns="0" bIns="0" anchor="t">
+            <a:spAutoFit/>
+          </a:bodyPr>
+          <a:lstStyle/>
+          <a:p>
+            <a:pPr algn="r">
+              <a:lnSpc>
+                <a:spcPct val="100000"/>
+              </a:lnSpc>
+            </a:pPr>
+            <a:r>
+              <a:rPr sz="1725" b="0">
+                <a:solidFill>
+                  <a:srgbClr val="7D7D7D"/>
+                </a:solidFill>
+                <a:latin typeface="Pretendard"/>
+                <a:ea typeface="Pretendard"/>
+                <a:cs typeface="Pretendard"/>
+              </a:rPr>
+              <a:t>10</a:t>
+            </a:r>
+          </a:p>
+        </p:txBody>
+      </p:sp>
+    </p:spTree>
+  </p:cSld>
+  <p:clrMapOvr>
+    <a:masterClrMapping/>
+  </p:clrMapOvr>
+</p:sld>
+</file>
+
+<file path=ppt/slides/slide11.xml><?xml version="1.0" encoding="utf-8"?>
+<p:sld xmlns:a="http://schemas.openxmlformats.org/drawingml/2006/main" xmlns:p="http://schemas.openxmlformats.org/presentationml/2006/main" xmlns:r="http://schemas.openxmlformats.org/officeDocument/2006/relationships">
+  <p:cSld>
+    <p:spTree>
+      <p:nvGrpSpPr>
+        <p:cNvPr id="1" name=""/>
+        <p:cNvGrpSpPr/>
+        <p:nvPr/>
+      </p:nvGrpSpPr>
+      <p:grpSpPr/>
+      <p:sp>
+        <p:nvSpPr>
+          <p:cNvPr id="2" name="deckgen:decor"/>
           <p:cNvSpPr/>
           <p:nvPr/>
         </p:nvSpPr>
@@ -3629,7 +4773,7 @@
       </p:sp>
       <p:sp>
         <p:nvSpPr>
-          <p:cNvPr id="3" name="Oval 2"/>
+          <p:cNvPr id="3" name="deckgen:decor"/>
           <p:cNvSpPr/>
           <p:nvPr/>
         </p:nvSpPr>
@@ -4153,7 +5297,7 @@
                 <a:ea typeface="Pretendard"/>
                 <a:cs typeface="Pretendard"/>
               </a:rPr>
-              <a:t>iceberg.properties 로 REST 카탈로그·MinIO 연결</a:t>
+              <a:t>iceberg.properties 로 카탈로그·MinIO 연결</a:t>
             </a:r>
           </a:p>
         </p:txBody>
@@ -4406,7 +5550,7 @@
       <p:grpSpPr/>
       <p:sp>
         <p:nvSpPr>
-          <p:cNvPr id="2" name="Oval 1"/>
+          <p:cNvPr id="2" name="deckgen:decor"/>
           <p:cNvSpPr/>
           <p:nvPr/>
         </p:nvSpPr>
@@ -4436,7 +5580,7 @@
       </p:sp>
       <p:sp>
         <p:nvSpPr>
-          <p:cNvPr id="3" name="Oval 2"/>
+          <p:cNvPr id="3" name="deckgen:decor"/>
           <p:cNvSpPr/>
           <p:nvPr/>
         </p:nvSpPr>
@@ -4466,7 +5610,7 @@
       </p:sp>
       <p:sp>
         <p:nvSpPr>
-          <p:cNvPr id="4" name="Oval 3"/>
+          <p:cNvPr id="4" name="deckgen:decor"/>
           <p:cNvSpPr/>
           <p:nvPr/>
         </p:nvSpPr>
@@ -5039,7 +6183,7 @@
                 <a:ea typeface="Pretendard"/>
                 <a:cs typeface="Pretendard"/>
               </a:rPr>
-              <a:t>자주 겪는 오류 네 가지의 원인과 해결을 안다</a:t>
+              <a:t>자주 겪는 오류 다섯 가지의 원인과 해결을 안다</a:t>
             </a:r>
           </a:p>
         </p:txBody>
@@ -5397,7 +6541,7 @@
       <p:grpSpPr/>
       <p:sp>
         <p:nvSpPr>
-          <p:cNvPr id="2" name="Oval 1"/>
+          <p:cNvPr id="2" name="deckgen:decor"/>
           <p:cNvSpPr/>
           <p:nvPr/>
         </p:nvSpPr>
@@ -5427,7 +6571,7 @@
       </p:sp>
       <p:sp>
         <p:nvSpPr>
-          <p:cNvPr id="3" name="Oval 2"/>
+          <p:cNvPr id="3" name="deckgen:decor"/>
           <p:cNvSpPr/>
           <p:nvPr/>
         </p:nvSpPr>
@@ -5457,7 +6601,7 @@
       </p:sp>
       <p:sp>
         <p:nvSpPr>
-          <p:cNvPr id="4" name="Oval 3"/>
+          <p:cNvPr id="4" name="deckgen:decor"/>
           <p:cNvSpPr/>
           <p:nvPr/>
         </p:nvSpPr>
@@ -7108,7 +8252,7 @@
       <p:grpSpPr/>
       <p:sp>
         <p:nvSpPr>
-          <p:cNvPr id="2" name="Oval 1"/>
+          <p:cNvPr id="2" name="deckgen:decor"/>
           <p:cNvSpPr/>
           <p:nvPr/>
         </p:nvSpPr>
@@ -7138,7 +8282,7 @@
       </p:sp>
       <p:sp>
         <p:nvSpPr>
-          <p:cNvPr id="3" name="Oval 2"/>
+          <p:cNvPr id="3" name="deckgen:decor"/>
           <p:cNvSpPr/>
           <p:nvPr/>
         </p:nvSpPr>
@@ -7168,7 +8312,7 @@
       </p:sp>
       <p:sp>
         <p:nvSpPr>
-          <p:cNvPr id="4" name="Oval 3"/>
+          <p:cNvPr id="4" name="deckgen:decor"/>
           <p:cNvSpPr/>
           <p:nvPr/>
         </p:nvSpPr>
@@ -7677,7 +8821,7 @@
                 <a:ea typeface="Pretendard"/>
                 <a:cs typeface="Pretendard"/>
               </a:rPr>
-              <a:t>4 는 61000 · 2 는 35000 · 6 은 걸러져 없다</a:t>
+              <a:t>4 choi 61000.0 app · 7 ok 18000.0 app · 6 은 걸러져 없다</a:t>
             </a:r>
           </a:p>
         </p:txBody>
@@ -8135,7 +9279,7 @@
       <p:grpSpPr/>
       <p:sp>
         <p:nvSpPr>
-          <p:cNvPr id="2" name="Oval 1"/>
+          <p:cNvPr id="2" name="deckgen:decor"/>
           <p:cNvSpPr/>
           <p:nvPr/>
         </p:nvSpPr>
@@ -8165,7 +9309,7 @@
       </p:sp>
       <p:sp>
         <p:nvSpPr>
-          <p:cNvPr id="3" name="Oval 2"/>
+          <p:cNvPr id="3" name="deckgen:decor"/>
           <p:cNvSpPr/>
           <p:nvPr/>
         </p:nvSpPr>
@@ -8195,7 +9339,7 @@
       </p:sp>
       <p:sp>
         <p:nvSpPr>
-          <p:cNvPr id="4" name="Oval 3"/>
+          <p:cNvPr id="4" name="deckgen:decor"/>
           <p:cNvSpPr/>
           <p:nvPr/>
         </p:nvSpPr>
@@ -8768,7 +9912,7 @@
                 <a:ea typeface="Pretendard"/>
                 <a:cs typeface="Pretendard"/>
               </a:rPr>
-              <a:t>s3a --conf 4종의 의미를 설명할 수 있다</a:t>
+              <a:t>s3a 에 필요한 --packages 하나와 --conf 네 개를 설명할 수 있다</a:t>
             </a:r>
           </a:p>
         </p:txBody>
@@ -8914,7 +10058,7 @@
                 <a:ea typeface="Pretendard"/>
                 <a:cs typeface="Pretendard"/>
               </a:rPr>
-              <a:t>ETL 을 짜기 전에 spark-shell 로 읽기부터 되는지 확인했다</a:t>
+              <a:t>ETL 을 짜기 전에 spark-shell 로 읽기부터 확인했다</a:t>
             </a:r>
           </a:p>
         </p:txBody>
@@ -9498,7 +10642,7 @@
                 <a:ea typeface="Pretendard"/>
                 <a:cs typeface="Pretendard"/>
               </a:rPr>
-              <a:t>새 파일만 추가해 증분 배치를 돌리고 불량 행이 걸러짐을 확인했다</a:t>
+              <a:t>새 파일만 추가한 증분 배치에서 불량 행이 걸러짐을 확인했다</a:t>
             </a:r>
           </a:p>
         </p:txBody>
@@ -9635,7 +10779,7 @@
       <p:grpSpPr/>
       <p:sp>
         <p:nvSpPr>
-          <p:cNvPr id="2" name="Oval 1"/>
+          <p:cNvPr id="2" name="deckgen:decor"/>
           <p:cNvSpPr/>
           <p:nvPr/>
         </p:nvSpPr>
@@ -9665,7 +10809,7 @@
       </p:sp>
       <p:sp>
         <p:nvSpPr>
-          <p:cNvPr id="3" name="Oval 2"/>
+          <p:cNvPr id="3" name="deckgen:decor"/>
           <p:cNvSpPr/>
           <p:nvPr/>
         </p:nvSpPr>
@@ -9695,7 +10839,7 @@
       </p:sp>
       <p:sp>
         <p:nvSpPr>
-          <p:cNvPr id="4" name="Oval 3"/>
+          <p:cNvPr id="4" name="deckgen:decor"/>
           <p:cNvSpPr/>
           <p:nvPr/>
         </p:nvSpPr>
@@ -9759,7 +10903,7 @@
                 <a:ea typeface="Pretendard"/>
                 <a:cs typeface="Pretendard"/>
               </a:rPr>
-              <a:t>자주 겪는 오류</a:t>
+              <a:t>자주 겪는 오류 ①</a:t>
             </a:r>
           </a:p>
         </p:txBody>
@@ -9800,7 +10944,7 @@
                 <a:ea typeface="Pretendard"/>
                 <a:cs typeface="Pretendard"/>
               </a:rPr>
-              <a:t>증상으로 찾는 원인과 해결</a:t>
+              <a:t>s3a 가 시작부터 막힐 때</a:t>
             </a:r>
           </a:p>
         </p:txBody>
@@ -10211,7 +11355,7 @@
                 <a:ea typeface="Pretendard"/>
                 <a:cs typeface="Pretendard"/>
               </a:rPr>
-              <a:t>실행 환경에 hadoop-aws</a:t>
+              <a:t>이 이미지에 hadoop-aws</a:t>
             </a:r>
           </a:p>
           <a:p>
@@ -10229,7 +11373,7 @@
                 <a:ea typeface="Pretendard"/>
                 <a:cs typeface="Pretendard"/>
               </a:rPr>
-              <a:t>라이브러리가 없다</a:t>
+              <a:t>(s3a 부품)가 없다</a:t>
             </a:r>
           </a:p>
         </p:txBody>
@@ -10304,7 +11448,7 @@
                 <a:ea typeface="Pretendard"/>
                 <a:cs typeface="Pretendard"/>
               </a:rPr>
-              <a:t>--packages</a:t>
+              <a:t>--packages 줄 추가</a:t>
             </a:r>
           </a:p>
           <a:p>
@@ -10322,7 +11466,7 @@
                 <a:ea typeface="Pretendard"/>
                 <a:cs typeface="Pretendard"/>
               </a:rPr>
-              <a:t>hadoop-aws:3.3.4 추가</a:t>
+              <a:t>hadoop-aws:3.3.4</a:t>
             </a:r>
           </a:p>
         </p:txBody>
@@ -10397,7 +11541,7 @@
                 <a:ea typeface="Pretendard"/>
                 <a:cs typeface="Pretendard"/>
               </a:rPr>
-              <a:t>s3a 읽기 403</a:t>
+              <a:t>시작 직후 몇 분간</a:t>
             </a:r>
           </a:p>
           <a:p>
@@ -10415,7 +11559,7 @@
                 <a:ea typeface="Pretendard"/>
                 <a:cs typeface="Pretendard"/>
               </a:rPr>
-              <a:t>AccessDenied</a:t>
+              <a:t>출력 없이 멈춤</a:t>
             </a:r>
           </a:p>
         </p:txBody>
@@ -10490,7 +11634,7 @@
                 <a:ea typeface="Pretendard"/>
                 <a:cs typeface="Pretendard"/>
               </a:rPr>
-              <a:t>access.key·secret.key 누락</a:t>
+              <a:t>첫 실행이라 부품</a:t>
             </a:r>
           </a:p>
           <a:p>
@@ -10508,7 +11652,7 @@
                 <a:ea typeface="Pretendard"/>
                 <a:cs typeface="Pretendard"/>
               </a:rPr>
-              <a:t>path.style.access 미설정</a:t>
+              <a:t>275MB 를 받는 중</a:t>
             </a:r>
           </a:p>
         </p:txBody>
@@ -10583,7 +11727,7 @@
                 <a:ea typeface="Pretendard"/>
                 <a:cs typeface="Pretendard"/>
               </a:rPr>
-              <a:t>--conf 4종 재확인</a:t>
+              <a:t>기다리기 · 미리 받기</a:t>
             </a:r>
           </a:p>
           <a:p>
@@ -10601,7 +11745,7 @@
                 <a:ea typeface="Pretendard"/>
                 <a:cs typeface="Pretendard"/>
               </a:rPr>
-              <a:t>endpoint 는 http://minio:9000</a:t>
+              <a:t>down 은 지움 · stop 은 유지</a:t>
             </a:r>
           </a:p>
         </p:txBody>
@@ -10676,7 +11820,7 @@
                 <a:ea typeface="Pretendard"/>
                 <a:cs typeface="Pretendard"/>
               </a:rPr>
-              <a:t>multiple source rows</a:t>
+              <a:t>오류 없이</a:t>
             </a:r>
           </a:p>
           <a:p>
@@ -10694,7 +11838,7 @@
                 <a:ea typeface="Pretendard"/>
                 <a:cs typeface="Pretendard"/>
               </a:rPr>
-              <a:t>matched a single target</a:t>
+              <a:t>6분 넘게 멈춤</a:t>
             </a:r>
           </a:p>
         </p:txBody>
@@ -10769,7 +11913,7 @@
                 <a:ea typeface="Pretendard"/>
                 <a:cs typeface="Pretendard"/>
               </a:rPr>
-              <a:t>원천에 같은 order_id</a:t>
+              <a:t>path.style.access 빠짐</a:t>
             </a:r>
           </a:p>
           <a:p>
@@ -10787,7 +11931,7 @@
                 <a:ea typeface="Pretendard"/>
                 <a:cs typeface="Pretendard"/>
               </a:rPr>
-              <a:t>여러 행</a:t>
+              <a:t>raw.minio 를 찾는 중</a:t>
             </a:r>
           </a:p>
         </p:txBody>
@@ -10862,7 +12006,7 @@
                 <a:ea typeface="Pretendard"/>
                 <a:cs typeface="Pretendard"/>
               </a:rPr>
-              <a:t>MERGE 전 ROW_NUMBER 로</a:t>
+              <a:t>Ctrl+C 뒤</a:t>
             </a:r>
           </a:p>
           <a:p>
@@ -10880,293 +12024,14 @@
                 <a:ea typeface="Pretendard"/>
                 <a:cs typeface="Pretendard"/>
               </a:rPr>
-              <a:t>키별 한 행만</a:t>
-            </a:r>
-          </a:p>
-        </p:txBody>
-      </p:sp>
-      <p:sp>
-        <p:nvSpPr>
-          <p:cNvPr id="32" name="Rounded Rectangle 31"/>
-          <p:cNvSpPr/>
-          <p:nvPr/>
-        </p:nvSpPr>
-        <p:spPr>
-          <a:xfrm>
-            <a:off x="1143000" y="5619750"/>
-            <a:ext cx="5082540" cy="647700"/>
-          </a:xfrm>
-          <a:prstGeom prst="roundRect">
-            <a:avLst>
-              <a:gd name="adj" fmla="val 5882"/>
-            </a:avLst>
-          </a:prstGeom>
-          <a:solidFill>
-            <a:srgbClr val="EDF3FD"/>
-          </a:solidFill>
-          <a:ln w="9525">
-            <a:solidFill>
-              <a:srgbClr val="BFD3F5"/>
-            </a:solidFill>
-          </a:ln>
-          <a:effectLst/>
-        </p:spPr>
-        <p:txBody>
-          <a:bodyPr rtlCol="0" anchor="ctr" wrap="square"/>
-          <a:lstStyle/>
-          <a:p>
-            <a:pPr algn="ctr"/>
-          </a:p>
-        </p:txBody>
-      </p:sp>
-      <p:sp>
-        <p:nvSpPr>
-          <p:cNvPr id="33" name="TextBox 32"/>
-          <p:cNvSpPr txBox="1"/>
-          <p:nvPr/>
-        </p:nvSpPr>
-        <p:spPr>
-          <a:xfrm>
-            <a:off x="1238250" y="5619750"/>
-            <a:ext cx="4892040" cy="647700"/>
-          </a:xfrm>
-          <a:prstGeom prst="rect">
-            <a:avLst/>
-          </a:prstGeom>
-          <a:noFill/>
-        </p:spPr>
-        <p:txBody>
-          <a:bodyPr wrap="square" lIns="0" rIns="0" tIns="0" bIns="0" anchor="ctr">
-            <a:spAutoFit/>
-          </a:bodyPr>
-          <a:lstStyle/>
-          <a:p>
-            <a:pPr algn="l">
-              <a:lnSpc>
-                <a:spcPct val="115000"/>
-              </a:lnSpc>
-            </a:pPr>
-            <a:r>
-              <a:rPr sz="1875" b="1">
-                <a:solidFill>
-                  <a:srgbClr val="0D2B5E"/>
-                </a:solidFill>
-                <a:latin typeface="Pretendard"/>
-                <a:ea typeface="Pretendard"/>
-                <a:cs typeface="Pretendard"/>
-              </a:rPr>
-              <a:t>실행마다 결과가</a:t>
-            </a:r>
-          </a:p>
-          <a:p>
-            <a:pPr algn="l">
-              <a:lnSpc>
-                <a:spcPct val="115000"/>
-              </a:lnSpc>
-            </a:pPr>
-            <a:r>
-              <a:rPr sz="1875" b="1">
-                <a:solidFill>
-                  <a:srgbClr val="0D2B5E"/>
-                </a:solidFill>
-                <a:latin typeface="Pretendard"/>
-                <a:ea typeface="Pretendard"/>
-                <a:cs typeface="Pretendard"/>
-              </a:rPr>
-              <a:t>미묘하게 다름</a:t>
-            </a:r>
-          </a:p>
-        </p:txBody>
-      </p:sp>
-      <p:sp>
-        <p:nvSpPr>
-          <p:cNvPr id="34" name="Rounded Rectangle 33"/>
-          <p:cNvSpPr/>
-          <p:nvPr/>
-        </p:nvSpPr>
-        <p:spPr>
-          <a:xfrm>
-            <a:off x="6263640" y="5619750"/>
-            <a:ext cx="5402580" cy="647700"/>
-          </a:xfrm>
-          <a:prstGeom prst="roundRect">
-            <a:avLst>
-              <a:gd name="adj" fmla="val 5882"/>
-            </a:avLst>
-          </a:prstGeom>
-          <a:solidFill>
-            <a:srgbClr val="FAFBFD"/>
-          </a:solidFill>
-          <a:ln w="9525">
-            <a:solidFill>
-              <a:srgbClr val="DCE1E8"/>
-            </a:solidFill>
-          </a:ln>
-          <a:effectLst/>
-        </p:spPr>
-        <p:txBody>
-          <a:bodyPr rtlCol="0" anchor="ctr" wrap="square"/>
-          <a:lstStyle/>
-          <a:p>
-            <a:pPr algn="ctr"/>
-          </a:p>
-        </p:txBody>
-      </p:sp>
-      <p:sp>
-        <p:nvSpPr>
-          <p:cNvPr id="35" name="TextBox 34"/>
-          <p:cNvSpPr txBox="1"/>
-          <p:nvPr/>
-        </p:nvSpPr>
-        <p:spPr>
-          <a:xfrm>
-            <a:off x="6358890" y="5619750"/>
-            <a:ext cx="5212080" cy="647700"/>
-          </a:xfrm>
-          <a:prstGeom prst="rect">
-            <a:avLst/>
-          </a:prstGeom>
-          <a:noFill/>
-        </p:spPr>
-        <p:txBody>
-          <a:bodyPr wrap="square" lIns="0" rIns="0" tIns="0" bIns="0" anchor="ctr">
-            <a:spAutoFit/>
-          </a:bodyPr>
-          <a:lstStyle/>
-          <a:p>
-            <a:pPr algn="ctr">
-              <a:lnSpc>
-                <a:spcPct val="115000"/>
-              </a:lnSpc>
-            </a:pPr>
-            <a:r>
-              <a:rPr sz="1875" b="0">
-                <a:solidFill>
-                  <a:srgbClr val="3D3D3D"/>
-                </a:solidFill>
-                <a:latin typeface="Pretendard"/>
-                <a:ea typeface="Pretendard"/>
-                <a:cs typeface="Pretendard"/>
-              </a:rPr>
-              <a:t>순서 없는 중복 제거</a:t>
-            </a:r>
-          </a:p>
-          <a:p>
-            <a:pPr algn="ctr">
-              <a:lnSpc>
-                <a:spcPct val="115000"/>
-              </a:lnSpc>
-            </a:pPr>
-            <a:r>
-              <a:rPr sz="1875" b="0">
-                <a:solidFill>
-                  <a:srgbClr val="3D3D3D"/>
-                </a:solidFill>
-                <a:latin typeface="Pretendard"/>
-                <a:ea typeface="Pretendard"/>
-                <a:cs typeface="Pretendard"/>
-              </a:rPr>
-              <a:t>(dropDuplicates)</a:t>
-            </a:r>
-          </a:p>
-        </p:txBody>
-      </p:sp>
-      <p:sp>
-        <p:nvSpPr>
-          <p:cNvPr id="36" name="Rounded Rectangle 35"/>
-          <p:cNvSpPr/>
-          <p:nvPr/>
-        </p:nvSpPr>
-        <p:spPr>
-          <a:xfrm>
-            <a:off x="11704320" y="5619750"/>
-            <a:ext cx="5440680" cy="647700"/>
-          </a:xfrm>
-          <a:prstGeom prst="roundRect">
-            <a:avLst>
-              <a:gd name="adj" fmla="val 5882"/>
-            </a:avLst>
-          </a:prstGeom>
-          <a:solidFill>
-            <a:srgbClr val="FAFBFD"/>
-          </a:solidFill>
-          <a:ln w="9525">
-            <a:solidFill>
-              <a:srgbClr val="DCE1E8"/>
-            </a:solidFill>
-          </a:ln>
-          <a:effectLst/>
-        </p:spPr>
-        <p:txBody>
-          <a:bodyPr rtlCol="0" anchor="ctr" wrap="square"/>
-          <a:lstStyle/>
-          <a:p>
-            <a:pPr algn="ctr"/>
-          </a:p>
-        </p:txBody>
-      </p:sp>
-      <p:sp>
-        <p:nvSpPr>
-          <p:cNvPr id="37" name="TextBox 36"/>
-          <p:cNvSpPr txBox="1"/>
-          <p:nvPr/>
-        </p:nvSpPr>
-        <p:spPr>
-          <a:xfrm>
-            <a:off x="11799570" y="5619750"/>
-            <a:ext cx="5250180" cy="647700"/>
-          </a:xfrm>
-          <a:prstGeom prst="rect">
-            <a:avLst/>
-          </a:prstGeom>
-          <a:noFill/>
-        </p:spPr>
-        <p:txBody>
-          <a:bodyPr wrap="square" lIns="0" rIns="0" tIns="0" bIns="0" anchor="ctr">
-            <a:spAutoFit/>
-          </a:bodyPr>
-          <a:lstStyle/>
-          <a:p>
-            <a:pPr algn="ctr">
-              <a:lnSpc>
-                <a:spcPct val="115000"/>
-              </a:lnSpc>
-            </a:pPr>
-            <a:r>
-              <a:rPr sz="1875" b="0">
-                <a:solidFill>
-                  <a:srgbClr val="3D3D3D"/>
-                </a:solidFill>
-                <a:latin typeface="Pretendard"/>
-                <a:ea typeface="Pretendard"/>
-                <a:cs typeface="Pretendard"/>
-              </a:rPr>
-              <a:t>Window + row_number 로</a:t>
-            </a:r>
-          </a:p>
-          <a:p>
-            <a:pPr algn="ctr">
-              <a:lnSpc>
-                <a:spcPct val="115000"/>
-              </a:lnSpc>
-            </a:pPr>
-            <a:r>
-              <a:rPr sz="1875" b="0">
-                <a:solidFill>
-                  <a:srgbClr val="3D3D3D"/>
-                </a:solidFill>
-                <a:latin typeface="Pretendard"/>
-                <a:ea typeface="Pretendard"/>
-                <a:cs typeface="Pretendard"/>
-              </a:rPr>
-              <a:t>규칙 명시</a:t>
-            </a:r>
-          </a:p>
-        </p:txBody>
-      </p:sp>
-      <p:sp>
-        <p:nvSpPr>
-          <p:cNvPr id="38" name="TextBox 37"/>
+              <a:t>--conf 네 줄 확인</a:t>
+            </a:r>
+          </a:p>
+        </p:txBody>
+      </p:sp>
+      <p:sp>
+        <p:nvSpPr>
+          <p:cNvPr id="32" name="TextBox 31"/>
           <p:cNvSpPr txBox="1"/>
           <p:nvPr/>
         </p:nvSpPr>
@@ -11200,14 +12065,14 @@
                 <a:ea typeface="Pretendard"/>
                 <a:cs typeface="Pretendard"/>
               </a:rPr>
-              <a:t>dropDuplicates 는 어느 행이 남을지 보장하지 않는다 — 규칙을 명시해야 실행마다 같은 결과</a:t>
-            </a:r>
-          </a:p>
-        </p:txBody>
-      </p:sp>
-      <p:sp>
-        <p:nvSpPr>
-          <p:cNvPr id="39" name="Rectangle 38"/>
+              <a:t>멈춤은 오류 문구가 없다 — 로그에 downloading 줄이 보이면 부품을 받는 중</a:t>
+            </a:r>
+          </a:p>
+        </p:txBody>
+      </p:sp>
+      <p:sp>
+        <p:nvSpPr>
+          <p:cNvPr id="33" name="Rectangle 32"/>
           <p:cNvSpPr/>
           <p:nvPr/>
         </p:nvSpPr>
@@ -11237,7 +12102,7 @@
       </p:sp>
       <p:sp>
         <p:nvSpPr>
-          <p:cNvPr id="40" name="TextBox 39"/>
+          <p:cNvPr id="34" name="TextBox 33"/>
           <p:cNvSpPr txBox="1"/>
           <p:nvPr/>
         </p:nvSpPr>
@@ -11278,7 +12143,7 @@
       </p:sp>
       <p:sp>
         <p:nvSpPr>
-          <p:cNvPr id="41" name="TextBox 40"/>
+          <p:cNvPr id="35" name="TextBox 34"/>
           <p:cNvSpPr txBox="1"/>
           <p:nvPr/>
         </p:nvSpPr>
@@ -11337,7 +12202,7 @@
       <p:grpSpPr/>
       <p:sp>
         <p:nvSpPr>
-          <p:cNvPr id="2" name="Oval 1"/>
+          <p:cNvPr id="2" name="deckgen:decor"/>
           <p:cNvSpPr/>
           <p:nvPr/>
         </p:nvSpPr>
@@ -11367,7 +12232,7 @@
       </p:sp>
       <p:sp>
         <p:nvSpPr>
-          <p:cNvPr id="3" name="Oval 2"/>
+          <p:cNvPr id="3" name="deckgen:decor"/>
           <p:cNvSpPr/>
           <p:nvPr/>
         </p:nvSpPr>
@@ -11397,7 +12262,7 @@
       </p:sp>
       <p:sp>
         <p:nvSpPr>
-          <p:cNvPr id="4" name="Oval 3"/>
+          <p:cNvPr id="4" name="deckgen:decor"/>
           <p:cNvSpPr/>
           <p:nvPr/>
         </p:nvSpPr>
@@ -11461,7 +12326,7 @@
                 <a:ea typeface="Pretendard"/>
                 <a:cs typeface="Pretendard"/>
               </a:rPr>
-              <a:t>예상 질문</a:t>
+              <a:t>자주 겪는 오류 ②</a:t>
             </a:r>
           </a:p>
         </p:txBody>
@@ -11502,7 +12367,7 @@
                 <a:ea typeface="Pretendard"/>
                 <a:cs typeface="Pretendard"/>
               </a:rPr>
-              <a:t>자주 나오는 질문 네 가지</a:t>
+              <a:t>읽기·적재가 실패할 때</a:t>
             </a:r>
           </a:p>
         </p:txBody>
@@ -11539,18 +12404,324 @@
       </p:sp>
       <p:sp>
         <p:nvSpPr>
-          <p:cNvPr id="8" name="Rounded Rectangle 7"/>
-          <p:cNvSpPr/>
-          <p:nvPr/>
-        </p:nvSpPr>
-        <p:spPr>
-          <a:xfrm>
-            <a:off x="1143000" y="3352800"/>
-            <a:ext cx="16002000" cy="914400"/>
+          <p:cNvPr id="8" name="Rectangle 7"/>
+          <p:cNvSpPr/>
+          <p:nvPr/>
+        </p:nvSpPr>
+        <p:spPr>
+          <a:xfrm>
+            <a:off x="1143000" y="2781300"/>
+            <a:ext cx="5082540" cy="590550"/>
+          </a:xfrm>
+          <a:prstGeom prst="rect">
+            <a:avLst/>
+          </a:prstGeom>
+          <a:solidFill>
+            <a:srgbClr val="0D2B5E"/>
+          </a:solidFill>
+          <a:ln>
+            <a:noFill/>
+          </a:ln>
+          <a:effectLst/>
+        </p:spPr>
+        <p:txBody>
+          <a:bodyPr rtlCol="0" anchor="ctr" wrap="square"/>
+          <a:lstStyle/>
+          <a:p>
+            <a:pPr algn="ctr"/>
+          </a:p>
+        </p:txBody>
+      </p:sp>
+      <p:sp>
+        <p:nvSpPr>
+          <p:cNvPr id="9" name="TextBox 8"/>
+          <p:cNvSpPr txBox="1"/>
+          <p:nvPr/>
+        </p:nvSpPr>
+        <p:spPr>
+          <a:xfrm>
+            <a:off x="1143000" y="2781300"/>
+            <a:ext cx="5082540" cy="590550"/>
+          </a:xfrm>
+          <a:prstGeom prst="rect">
+            <a:avLst/>
+          </a:prstGeom>
+          <a:noFill/>
+        </p:spPr>
+        <p:txBody>
+          <a:bodyPr wrap="square" lIns="0" rIns="0" tIns="0" bIns="0" anchor="ctr">
+            <a:spAutoFit/>
+          </a:bodyPr>
+          <a:lstStyle/>
+          <a:p>
+            <a:pPr algn="ctr">
+              <a:lnSpc>
+                <a:spcPct val="100000"/>
+              </a:lnSpc>
+            </a:pPr>
+            <a:r>
+              <a:rPr sz="2025" b="1">
+                <a:solidFill>
+                  <a:srgbClr val="FFFFFF"/>
+                </a:solidFill>
+                <a:latin typeface="Pretendard"/>
+                <a:ea typeface="Pretendard"/>
+                <a:cs typeface="Pretendard"/>
+              </a:rPr>
+              <a:t>증상</a:t>
+            </a:r>
+          </a:p>
+        </p:txBody>
+      </p:sp>
+      <p:sp>
+        <p:nvSpPr>
+          <p:cNvPr id="10" name="Rectangle 9"/>
+          <p:cNvSpPr/>
+          <p:nvPr/>
+        </p:nvSpPr>
+        <p:spPr>
+          <a:xfrm>
+            <a:off x="6263640" y="2781300"/>
+            <a:ext cx="5402580" cy="590550"/>
+          </a:xfrm>
+          <a:prstGeom prst="rect">
+            <a:avLst/>
+          </a:prstGeom>
+          <a:solidFill>
+            <a:srgbClr val="1E5BC6"/>
+          </a:solidFill>
+          <a:ln>
+            <a:noFill/>
+          </a:ln>
+          <a:effectLst/>
+        </p:spPr>
+        <p:txBody>
+          <a:bodyPr rtlCol="0" anchor="ctr" wrap="square"/>
+          <a:lstStyle/>
+          <a:p>
+            <a:pPr algn="ctr"/>
+          </a:p>
+        </p:txBody>
+      </p:sp>
+      <p:sp>
+        <p:nvSpPr>
+          <p:cNvPr id="11" name="TextBox 10"/>
+          <p:cNvSpPr txBox="1"/>
+          <p:nvPr/>
+        </p:nvSpPr>
+        <p:spPr>
+          <a:xfrm>
+            <a:off x="6263640" y="2781300"/>
+            <a:ext cx="5402580" cy="590550"/>
+          </a:xfrm>
+          <a:prstGeom prst="rect">
+            <a:avLst/>
+          </a:prstGeom>
+          <a:noFill/>
+        </p:spPr>
+        <p:txBody>
+          <a:bodyPr wrap="square" lIns="0" rIns="0" tIns="0" bIns="0" anchor="ctr">
+            <a:spAutoFit/>
+          </a:bodyPr>
+          <a:lstStyle/>
+          <a:p>
+            <a:pPr algn="ctr">
+              <a:lnSpc>
+                <a:spcPct val="100000"/>
+              </a:lnSpc>
+            </a:pPr>
+            <a:r>
+              <a:rPr sz="2025" b="1">
+                <a:solidFill>
+                  <a:srgbClr val="FFFFFF"/>
+                </a:solidFill>
+                <a:latin typeface="Pretendard"/>
+                <a:ea typeface="Pretendard"/>
+                <a:cs typeface="Pretendard"/>
+              </a:rPr>
+              <a:t>원인</a:t>
+            </a:r>
+          </a:p>
+        </p:txBody>
+      </p:sp>
+      <p:sp>
+        <p:nvSpPr>
+          <p:cNvPr id="12" name="Rectangle 11"/>
+          <p:cNvSpPr/>
+          <p:nvPr/>
+        </p:nvSpPr>
+        <p:spPr>
+          <a:xfrm>
+            <a:off x="11704320" y="2781300"/>
+            <a:ext cx="5440680" cy="590550"/>
+          </a:xfrm>
+          <a:prstGeom prst="rect">
+            <a:avLst/>
+          </a:prstGeom>
+          <a:solidFill>
+            <a:srgbClr val="1E5BC6"/>
+          </a:solidFill>
+          <a:ln>
+            <a:noFill/>
+          </a:ln>
+          <a:effectLst/>
+        </p:spPr>
+        <p:txBody>
+          <a:bodyPr rtlCol="0" anchor="ctr" wrap="square"/>
+          <a:lstStyle/>
+          <a:p>
+            <a:pPr algn="ctr"/>
+          </a:p>
+        </p:txBody>
+      </p:sp>
+      <p:sp>
+        <p:nvSpPr>
+          <p:cNvPr id="13" name="TextBox 12"/>
+          <p:cNvSpPr txBox="1"/>
+          <p:nvPr/>
+        </p:nvSpPr>
+        <p:spPr>
+          <a:xfrm>
+            <a:off x="11704320" y="2781300"/>
+            <a:ext cx="5440680" cy="590550"/>
+          </a:xfrm>
+          <a:prstGeom prst="rect">
+            <a:avLst/>
+          </a:prstGeom>
+          <a:noFill/>
+        </p:spPr>
+        <p:txBody>
+          <a:bodyPr wrap="square" lIns="0" rIns="0" tIns="0" bIns="0" anchor="ctr">
+            <a:spAutoFit/>
+          </a:bodyPr>
+          <a:lstStyle/>
+          <a:p>
+            <a:pPr algn="ctr">
+              <a:lnSpc>
+                <a:spcPct val="100000"/>
+              </a:lnSpc>
+            </a:pPr>
+            <a:r>
+              <a:rPr sz="2025" b="1">
+                <a:solidFill>
+                  <a:srgbClr val="FFFFFF"/>
+                </a:solidFill>
+                <a:latin typeface="Pretendard"/>
+                <a:ea typeface="Pretendard"/>
+                <a:cs typeface="Pretendard"/>
+              </a:rPr>
+              <a:t>해결</a:t>
+            </a:r>
+          </a:p>
+        </p:txBody>
+      </p:sp>
+      <p:sp>
+        <p:nvSpPr>
+          <p:cNvPr id="14" name="Rounded Rectangle 13"/>
+          <p:cNvSpPr/>
+          <p:nvPr/>
+        </p:nvSpPr>
+        <p:spPr>
+          <a:xfrm>
+            <a:off x="1143000" y="3448050"/>
+            <a:ext cx="5082540" cy="647700"/>
           </a:xfrm>
           <a:prstGeom prst="roundRect">
             <a:avLst>
-              <a:gd name="adj" fmla="val 5208"/>
+              <a:gd name="adj" fmla="val 5882"/>
+            </a:avLst>
+          </a:prstGeom>
+          <a:solidFill>
+            <a:srgbClr val="EDF3FD"/>
+          </a:solidFill>
+          <a:ln w="9525">
+            <a:solidFill>
+              <a:srgbClr val="BFD3F5"/>
+            </a:solidFill>
+          </a:ln>
+          <a:effectLst/>
+        </p:spPr>
+        <p:txBody>
+          <a:bodyPr rtlCol="0" anchor="ctr" wrap="square"/>
+          <a:lstStyle/>
+          <a:p>
+            <a:pPr algn="ctr"/>
+          </a:p>
+        </p:txBody>
+      </p:sp>
+      <p:sp>
+        <p:nvSpPr>
+          <p:cNvPr id="15" name="TextBox 14"/>
+          <p:cNvSpPr txBox="1"/>
+          <p:nvPr/>
+        </p:nvSpPr>
+        <p:spPr>
+          <a:xfrm>
+            <a:off x="1238250" y="3448050"/>
+            <a:ext cx="4892040" cy="647700"/>
+          </a:xfrm>
+          <a:prstGeom prst="rect">
+            <a:avLst/>
+          </a:prstGeom>
+          <a:noFill/>
+        </p:spPr>
+        <p:txBody>
+          <a:bodyPr wrap="square" lIns="0" rIns="0" tIns="0" bIns="0" anchor="ctr">
+            <a:spAutoFit/>
+          </a:bodyPr>
+          <a:lstStyle/>
+          <a:p>
+            <a:pPr algn="l">
+              <a:lnSpc>
+                <a:spcPct val="115000"/>
+              </a:lnSpc>
+            </a:pPr>
+            <a:r>
+              <a:rPr sz="1875" b="1">
+                <a:solidFill>
+                  <a:srgbClr val="0D2B5E"/>
+                </a:solidFill>
+                <a:latin typeface="Pretendard"/>
+                <a:ea typeface="Pretendard"/>
+                <a:cs typeface="Pretendard"/>
+              </a:rPr>
+              <a:t>s3a 읽기 403</a:t>
+            </a:r>
+          </a:p>
+          <a:p>
+            <a:pPr algn="l">
+              <a:lnSpc>
+                <a:spcPct val="115000"/>
+              </a:lnSpc>
+            </a:pPr>
+            <a:r>
+              <a:rPr sz="1875" b="1">
+                <a:solidFill>
+                  <a:srgbClr val="0D2B5E"/>
+                </a:solidFill>
+                <a:latin typeface="Pretendard"/>
+                <a:ea typeface="Pretendard"/>
+                <a:cs typeface="Pretendard"/>
+              </a:rPr>
+              <a:t>AccessDenied</a:t>
+            </a:r>
+          </a:p>
+        </p:txBody>
+      </p:sp>
+      <p:sp>
+        <p:nvSpPr>
+          <p:cNvPr id="16" name="Rounded Rectangle 15"/>
+          <p:cNvSpPr/>
+          <p:nvPr/>
+        </p:nvSpPr>
+        <p:spPr>
+          <a:xfrm>
+            <a:off x="6263640" y="3448050"/>
+            <a:ext cx="5402580" cy="647700"/>
+          </a:xfrm>
+          <a:prstGeom prst="roundRect">
+            <a:avLst>
+              <a:gd name="adj" fmla="val 5882"/>
             </a:avLst>
           </a:prstGeom>
           <a:solidFill>
@@ -11573,115 +12744,14 @@
       </p:sp>
       <p:sp>
         <p:nvSpPr>
-          <p:cNvPr id="9" name="Rectangle 8"/>
-          <p:cNvSpPr/>
-          <p:nvPr/>
-        </p:nvSpPr>
-        <p:spPr>
-          <a:xfrm>
-            <a:off x="1143000" y="3352800"/>
-            <a:ext cx="47625" cy="914400"/>
-          </a:xfrm>
-          <a:prstGeom prst="rect">
-            <a:avLst/>
-          </a:prstGeom>
-          <a:solidFill>
-            <a:srgbClr val="1E5BC6"/>
-          </a:solidFill>
-          <a:ln>
-            <a:noFill/>
-          </a:ln>
-          <a:effectLst/>
-        </p:spPr>
-        <p:txBody>
-          <a:bodyPr rtlCol="0" anchor="ctr" wrap="square"/>
-          <a:lstStyle/>
-          <a:p>
-            <a:pPr algn="ctr"/>
-          </a:p>
-        </p:txBody>
-      </p:sp>
-      <p:sp>
-        <p:nvSpPr>
-          <p:cNvPr id="10" name="Oval 9"/>
-          <p:cNvSpPr/>
-          <p:nvPr/>
-        </p:nvSpPr>
-        <p:spPr>
-          <a:xfrm>
-            <a:off x="1428750" y="3600450"/>
-            <a:ext cx="419100" cy="419100"/>
-          </a:xfrm>
-          <a:prstGeom prst="ellipse">
-            <a:avLst/>
-          </a:prstGeom>
-          <a:solidFill>
-            <a:srgbClr val="0D2B5E"/>
-          </a:solidFill>
-          <a:ln>
-            <a:noFill/>
-          </a:ln>
-          <a:effectLst/>
-        </p:spPr>
-        <p:txBody>
-          <a:bodyPr rtlCol="0" anchor="ctr" wrap="square"/>
-          <a:lstStyle/>
-          <a:p>
-            <a:pPr algn="ctr"/>
-          </a:p>
-        </p:txBody>
-      </p:sp>
-      <p:sp>
-        <p:nvSpPr>
-          <p:cNvPr id="11" name="TextBox 10"/>
+          <p:cNvPr id="17" name="TextBox 16"/>
           <p:cNvSpPr txBox="1"/>
           <p:nvPr/>
         </p:nvSpPr>
         <p:spPr>
           <a:xfrm>
-            <a:off x="1428750" y="3667125"/>
-            <a:ext cx="419100" cy="304800"/>
-          </a:xfrm>
-          <a:prstGeom prst="rect">
-            <a:avLst/>
-          </a:prstGeom>
-          <a:noFill/>
-        </p:spPr>
-        <p:txBody>
-          <a:bodyPr wrap="square" lIns="0" rIns="0" tIns="0" bIns="0" anchor="t">
-            <a:spAutoFit/>
-          </a:bodyPr>
-          <a:lstStyle/>
-          <a:p>
-            <a:pPr algn="ctr">
-              <a:lnSpc>
-                <a:spcPct val="100000"/>
-              </a:lnSpc>
-            </a:pPr>
-            <a:r>
-              <a:rPr sz="1875" b="1">
-                <a:solidFill>
-                  <a:srgbClr val="FFFFFF"/>
-                </a:solidFill>
-                <a:latin typeface="Pretendard"/>
-                <a:ea typeface="Pretendard"/>
-                <a:cs typeface="Pretendard"/>
-              </a:rPr>
-              <a:t>1</a:t>
-            </a:r>
-          </a:p>
-        </p:txBody>
-      </p:sp>
-      <p:sp>
-        <p:nvSpPr>
-          <p:cNvPr id="12" name="TextBox 11"/>
-          <p:cNvSpPr txBox="1"/>
-          <p:nvPr/>
-        </p:nvSpPr>
-        <p:spPr>
-          <a:xfrm>
-            <a:off x="2057400" y="3448050"/>
-            <a:ext cx="14763750" cy="723900"/>
+            <a:off x="6358890" y="3448050"/>
+            <a:ext cx="5212080" cy="647700"/>
           </a:xfrm>
           <a:prstGeom prst="rect">
             <a:avLst/>
@@ -11694,31 +12764,10 @@
           </a:bodyPr>
           <a:lstStyle/>
           <a:p>
-            <a:pPr>
-              <a:lnSpc>
-                <a:spcPct val="120000"/>
-              </a:lnSpc>
-            </a:pPr>
-            <a:r>
-              <a:rPr sz="2175" b="1">
-                <a:solidFill>
-                  <a:srgbClr val="0D2B5E"/>
-                </a:solidFill>
-                <a:latin typeface="Pretendard"/>
-                <a:ea typeface="Pretendard"/>
-                <a:cs typeface="Pretendard"/>
-              </a:rPr>
-              <a:t>매번 랜딩 존 전체를 읽으면 느리지 않나요?</a:t>
-            </a:r>
-          </a:p>
-          <a:p>
-            <a:pPr>
-              <a:lnSpc>
-                <a:spcPct val="130000"/>
-              </a:lnSpc>
-              <a:spcBef>
-                <a:spcPts val="300"/>
-              </a:spcBef>
+            <a:pPr algn="ctr">
+              <a:lnSpc>
+                <a:spcPct val="115000"/>
+              </a:lnSpc>
             </a:pPr>
             <a:r>
               <a:rPr sz="1875" b="0">
@@ -11729,25 +12778,43 @@
                 <a:ea typeface="Pretendard"/>
                 <a:cs typeface="Pretendard"/>
               </a:rPr>
-              <a:t>느려진다 — 날짜 파티션 경로만 읽거나 처리한 파일을 다른 접두사로 옮긴다. 8주차 Airflow 에서</a:t>
-            </a:r>
-          </a:p>
-        </p:txBody>
-      </p:sp>
-      <p:sp>
-        <p:nvSpPr>
-          <p:cNvPr id="13" name="Rounded Rectangle 12"/>
-          <p:cNvSpPr/>
-          <p:nvPr/>
-        </p:nvSpPr>
-        <p:spPr>
-          <a:xfrm>
-            <a:off x="1143000" y="4400550"/>
-            <a:ext cx="16002000" cy="914400"/>
+              <a:t>access.key·secret.key</a:t>
+            </a:r>
+          </a:p>
+          <a:p>
+            <a:pPr algn="ctr">
+              <a:lnSpc>
+                <a:spcPct val="115000"/>
+              </a:lnSpc>
+            </a:pPr>
+            <a:r>
+              <a:rPr sz="1875" b="0">
+                <a:solidFill>
+                  <a:srgbClr val="3D3D3D"/>
+                </a:solidFill>
+                <a:latin typeface="Pretendard"/>
+                <a:ea typeface="Pretendard"/>
+                <a:cs typeface="Pretendard"/>
+              </a:rPr>
+              <a:t>누락 또는 오타</a:t>
+            </a:r>
+          </a:p>
+        </p:txBody>
+      </p:sp>
+      <p:sp>
+        <p:nvSpPr>
+          <p:cNvPr id="18" name="Rounded Rectangle 17"/>
+          <p:cNvSpPr/>
+          <p:nvPr/>
+        </p:nvSpPr>
+        <p:spPr>
+          <a:xfrm>
+            <a:off x="11704320" y="3448050"/>
+            <a:ext cx="5440680" cy="647700"/>
           </a:xfrm>
           <a:prstGeom prst="roundRect">
             <a:avLst>
-              <a:gd name="adj" fmla="val 5208"/>
+              <a:gd name="adj" fmla="val 5882"/>
             </a:avLst>
           </a:prstGeom>
           <a:solidFill>
@@ -11770,115 +12837,14 @@
       </p:sp>
       <p:sp>
         <p:nvSpPr>
-          <p:cNvPr id="14" name="Rectangle 13"/>
-          <p:cNvSpPr/>
-          <p:nvPr/>
-        </p:nvSpPr>
-        <p:spPr>
-          <a:xfrm>
-            <a:off x="1143000" y="4400550"/>
-            <a:ext cx="47625" cy="914400"/>
-          </a:xfrm>
-          <a:prstGeom prst="rect">
-            <a:avLst/>
-          </a:prstGeom>
-          <a:solidFill>
-            <a:srgbClr val="1E5BC6"/>
-          </a:solidFill>
-          <a:ln>
-            <a:noFill/>
-          </a:ln>
-          <a:effectLst/>
-        </p:spPr>
-        <p:txBody>
-          <a:bodyPr rtlCol="0" anchor="ctr" wrap="square"/>
-          <a:lstStyle/>
-          <a:p>
-            <a:pPr algn="ctr"/>
-          </a:p>
-        </p:txBody>
-      </p:sp>
-      <p:sp>
-        <p:nvSpPr>
-          <p:cNvPr id="15" name="Oval 14"/>
-          <p:cNvSpPr/>
-          <p:nvPr/>
-        </p:nvSpPr>
-        <p:spPr>
-          <a:xfrm>
-            <a:off x="1428750" y="4648200"/>
-            <a:ext cx="419100" cy="419100"/>
-          </a:xfrm>
-          <a:prstGeom prst="ellipse">
-            <a:avLst/>
-          </a:prstGeom>
-          <a:solidFill>
-            <a:srgbClr val="0D2B5E"/>
-          </a:solidFill>
-          <a:ln>
-            <a:noFill/>
-          </a:ln>
-          <a:effectLst/>
-        </p:spPr>
-        <p:txBody>
-          <a:bodyPr rtlCol="0" anchor="ctr" wrap="square"/>
-          <a:lstStyle/>
-          <a:p>
-            <a:pPr algn="ctr"/>
-          </a:p>
-        </p:txBody>
-      </p:sp>
-      <p:sp>
-        <p:nvSpPr>
-          <p:cNvPr id="16" name="TextBox 15"/>
+          <p:cNvPr id="19" name="TextBox 18"/>
           <p:cNvSpPr txBox="1"/>
           <p:nvPr/>
         </p:nvSpPr>
         <p:spPr>
           <a:xfrm>
-            <a:off x="1428750" y="4714875"/>
-            <a:ext cx="419100" cy="304800"/>
-          </a:xfrm>
-          <a:prstGeom prst="rect">
-            <a:avLst/>
-          </a:prstGeom>
-          <a:noFill/>
-        </p:spPr>
-        <p:txBody>
-          <a:bodyPr wrap="square" lIns="0" rIns="0" tIns="0" bIns="0" anchor="t">
-            <a:spAutoFit/>
-          </a:bodyPr>
-          <a:lstStyle/>
-          <a:p>
-            <a:pPr algn="ctr">
-              <a:lnSpc>
-                <a:spcPct val="100000"/>
-              </a:lnSpc>
-            </a:pPr>
-            <a:r>
-              <a:rPr sz="1875" b="1">
-                <a:solidFill>
-                  <a:srgbClr val="FFFFFF"/>
-                </a:solidFill>
-                <a:latin typeface="Pretendard"/>
-                <a:ea typeface="Pretendard"/>
-                <a:cs typeface="Pretendard"/>
-              </a:rPr>
-              <a:t>2</a:t>
-            </a:r>
-          </a:p>
-        </p:txBody>
-      </p:sp>
-      <p:sp>
-        <p:nvSpPr>
-          <p:cNvPr id="17" name="TextBox 16"/>
-          <p:cNvSpPr txBox="1"/>
-          <p:nvPr/>
-        </p:nvSpPr>
-        <p:spPr>
-          <a:xfrm>
-            <a:off x="2057400" y="4495800"/>
-            <a:ext cx="14763750" cy="723900"/>
+            <a:off x="11799570" y="3448050"/>
+            <a:ext cx="5250180" cy="647700"/>
           </a:xfrm>
           <a:prstGeom prst="rect">
             <a:avLst/>
@@ -11891,31 +12857,10 @@
           </a:bodyPr>
           <a:lstStyle/>
           <a:p>
-            <a:pPr>
-              <a:lnSpc>
-                <a:spcPct val="120000"/>
-              </a:lnSpc>
-            </a:pPr>
-            <a:r>
-              <a:rPr sz="2175" b="1">
-                <a:solidFill>
-                  <a:srgbClr val="0D2B5E"/>
-                </a:solidFill>
-                <a:latin typeface="Pretendard"/>
-                <a:ea typeface="Pretendard"/>
-                <a:cs typeface="Pretendard"/>
-              </a:rPr>
-              <a:t>MERGE 대신 INSERT OVERWRITE 는요?</a:t>
-            </a:r>
-          </a:p>
-          <a:p>
-            <a:pPr>
-              <a:lnSpc>
-                <a:spcPct val="130000"/>
-              </a:lnSpc>
-              <a:spcBef>
-                <a:spcPts val="300"/>
-              </a:spcBef>
+            <a:pPr algn="ctr">
+              <a:lnSpc>
+                <a:spcPct val="115000"/>
+              </a:lnSpc>
             </a:pPr>
             <a:r>
               <a:rPr sz="1875" b="0">
@@ -11926,25 +12871,136 @@
                 <a:ea typeface="Pretendard"/>
                 <a:cs typeface="Pretendard"/>
               </a:rPr>
-              <a:t>파티션 단위로 통째로 갈아 끼우는 방식이라 그것도 멱등 — 갱신 대상이 흩어져 있으면 MERGE 가 낫다</a:t>
-            </a:r>
-          </a:p>
-        </p:txBody>
-      </p:sp>
-      <p:sp>
-        <p:nvSpPr>
-          <p:cNvPr id="18" name="Rounded Rectangle 17"/>
-          <p:cNvSpPr/>
-          <p:nvPr/>
-        </p:nvSpPr>
-        <p:spPr>
-          <a:xfrm>
-            <a:off x="1143000" y="5448300"/>
-            <a:ext cx="16002000" cy="914400"/>
+              <a:t>--conf 4종 재확인</a:t>
+            </a:r>
+          </a:p>
+          <a:p>
+            <a:pPr algn="ctr">
+              <a:lnSpc>
+                <a:spcPct val="115000"/>
+              </a:lnSpc>
+            </a:pPr>
+            <a:r>
+              <a:rPr sz="1875" b="0">
+                <a:solidFill>
+                  <a:srgbClr val="3D3D3D"/>
+                </a:solidFill>
+                <a:latin typeface="Pretendard"/>
+                <a:ea typeface="Pretendard"/>
+                <a:cs typeface="Pretendard"/>
+              </a:rPr>
+              <a:t>http://minio:9000</a:t>
+            </a:r>
+          </a:p>
+        </p:txBody>
+      </p:sp>
+      <p:sp>
+        <p:nvSpPr>
+          <p:cNvPr id="20" name="Rounded Rectangle 19"/>
+          <p:cNvSpPr/>
+          <p:nvPr/>
+        </p:nvSpPr>
+        <p:spPr>
+          <a:xfrm>
+            <a:off x="1143000" y="4171950"/>
+            <a:ext cx="5082540" cy="647700"/>
           </a:xfrm>
           <a:prstGeom prst="roundRect">
             <a:avLst>
-              <a:gd name="adj" fmla="val 5208"/>
+              <a:gd name="adj" fmla="val 5882"/>
+            </a:avLst>
+          </a:prstGeom>
+          <a:solidFill>
+            <a:srgbClr val="EDF3FD"/>
+          </a:solidFill>
+          <a:ln w="9525">
+            <a:solidFill>
+              <a:srgbClr val="BFD3F5"/>
+            </a:solidFill>
+          </a:ln>
+          <a:effectLst/>
+        </p:spPr>
+        <p:txBody>
+          <a:bodyPr rtlCol="0" anchor="ctr" wrap="square"/>
+          <a:lstStyle/>
+          <a:p>
+            <a:pPr algn="ctr"/>
+          </a:p>
+        </p:txBody>
+      </p:sp>
+      <p:sp>
+        <p:nvSpPr>
+          <p:cNvPr id="21" name="TextBox 20"/>
+          <p:cNvSpPr txBox="1"/>
+          <p:nvPr/>
+        </p:nvSpPr>
+        <p:spPr>
+          <a:xfrm>
+            <a:off x="1238250" y="4171950"/>
+            <a:ext cx="4892040" cy="647700"/>
+          </a:xfrm>
+          <a:prstGeom prst="rect">
+            <a:avLst/>
+          </a:prstGeom>
+          <a:noFill/>
+        </p:spPr>
+        <p:txBody>
+          <a:bodyPr wrap="square" lIns="0" rIns="0" tIns="0" bIns="0" anchor="ctr">
+            <a:spAutoFit/>
+          </a:bodyPr>
+          <a:lstStyle/>
+          <a:p>
+            <a:pPr algn="l">
+              <a:lnSpc>
+                <a:spcPct val="115000"/>
+              </a:lnSpc>
+            </a:pPr>
+            <a:r>
+              <a:rPr sz="1875" b="1">
+                <a:solidFill>
+                  <a:srgbClr val="0D2B5E"/>
+                </a:solidFill>
+                <a:latin typeface="Pretendard"/>
+                <a:ea typeface="Pretendard"/>
+                <a:cs typeface="Pretendard"/>
+              </a:rPr>
+              <a:t>[MERGE_CARDINALITY_</a:t>
+            </a:r>
+          </a:p>
+          <a:p>
+            <a:pPr algn="l">
+              <a:lnSpc>
+                <a:spcPct val="115000"/>
+              </a:lnSpc>
+            </a:pPr>
+            <a:r>
+              <a:rPr sz="1875" b="1">
+                <a:solidFill>
+                  <a:srgbClr val="0D2B5E"/>
+                </a:solidFill>
+                <a:latin typeface="Pretendard"/>
+                <a:ea typeface="Pretendard"/>
+                <a:cs typeface="Pretendard"/>
+              </a:rPr>
+              <a:t>VIOLATION]</a:t>
+            </a:r>
+          </a:p>
+        </p:txBody>
+      </p:sp>
+      <p:sp>
+        <p:nvSpPr>
+          <p:cNvPr id="22" name="Rounded Rectangle 21"/>
+          <p:cNvSpPr/>
+          <p:nvPr/>
+        </p:nvSpPr>
+        <p:spPr>
+          <a:xfrm>
+            <a:off x="6263640" y="4171950"/>
+            <a:ext cx="5402580" cy="647700"/>
+          </a:xfrm>
+          <a:prstGeom prst="roundRect">
+            <a:avLst>
+              <a:gd name="adj" fmla="val 5882"/>
             </a:avLst>
           </a:prstGeom>
           <a:solidFill>
@@ -11967,115 +13023,14 @@
       </p:sp>
       <p:sp>
         <p:nvSpPr>
-          <p:cNvPr id="19" name="Rectangle 18"/>
-          <p:cNvSpPr/>
-          <p:nvPr/>
-        </p:nvSpPr>
-        <p:spPr>
-          <a:xfrm>
-            <a:off x="1143000" y="5448300"/>
-            <a:ext cx="47625" cy="914400"/>
-          </a:xfrm>
-          <a:prstGeom prst="rect">
-            <a:avLst/>
-          </a:prstGeom>
-          <a:solidFill>
-            <a:srgbClr val="1E5BC6"/>
-          </a:solidFill>
-          <a:ln>
-            <a:noFill/>
-          </a:ln>
-          <a:effectLst/>
-        </p:spPr>
-        <p:txBody>
-          <a:bodyPr rtlCol="0" anchor="ctr" wrap="square"/>
-          <a:lstStyle/>
-          <a:p>
-            <a:pPr algn="ctr"/>
-          </a:p>
-        </p:txBody>
-      </p:sp>
-      <p:sp>
-        <p:nvSpPr>
-          <p:cNvPr id="20" name="Oval 19"/>
-          <p:cNvSpPr/>
-          <p:nvPr/>
-        </p:nvSpPr>
-        <p:spPr>
-          <a:xfrm>
-            <a:off x="1428750" y="5695950"/>
-            <a:ext cx="419100" cy="419100"/>
-          </a:xfrm>
-          <a:prstGeom prst="ellipse">
-            <a:avLst/>
-          </a:prstGeom>
-          <a:solidFill>
-            <a:srgbClr val="0D2B5E"/>
-          </a:solidFill>
-          <a:ln>
-            <a:noFill/>
-          </a:ln>
-          <a:effectLst/>
-        </p:spPr>
-        <p:txBody>
-          <a:bodyPr rtlCol="0" anchor="ctr" wrap="square"/>
-          <a:lstStyle/>
-          <a:p>
-            <a:pPr algn="ctr"/>
-          </a:p>
-        </p:txBody>
-      </p:sp>
-      <p:sp>
-        <p:nvSpPr>
-          <p:cNvPr id="21" name="TextBox 20"/>
+          <p:cNvPr id="23" name="TextBox 22"/>
           <p:cNvSpPr txBox="1"/>
           <p:nvPr/>
         </p:nvSpPr>
         <p:spPr>
           <a:xfrm>
-            <a:off x="1428750" y="5762625"/>
-            <a:ext cx="419100" cy="304800"/>
-          </a:xfrm>
-          <a:prstGeom prst="rect">
-            <a:avLst/>
-          </a:prstGeom>
-          <a:noFill/>
-        </p:spPr>
-        <p:txBody>
-          <a:bodyPr wrap="square" lIns="0" rIns="0" tIns="0" bIns="0" anchor="t">
-            <a:spAutoFit/>
-          </a:bodyPr>
-          <a:lstStyle/>
-          <a:p>
-            <a:pPr algn="ctr">
-              <a:lnSpc>
-                <a:spcPct val="100000"/>
-              </a:lnSpc>
-            </a:pPr>
-            <a:r>
-              <a:rPr sz="1875" b="1">
-                <a:solidFill>
-                  <a:srgbClr val="FFFFFF"/>
-                </a:solidFill>
-                <a:latin typeface="Pretendard"/>
-                <a:ea typeface="Pretendard"/>
-                <a:cs typeface="Pretendard"/>
-              </a:rPr>
-              <a:t>3</a:t>
-            </a:r>
-          </a:p>
-        </p:txBody>
-      </p:sp>
-      <p:sp>
-        <p:nvSpPr>
-          <p:cNvPr id="22" name="TextBox 21"/>
-          <p:cNvSpPr txBox="1"/>
-          <p:nvPr/>
-        </p:nvSpPr>
-        <p:spPr>
-          <a:xfrm>
-            <a:off x="2057400" y="5543550"/>
-            <a:ext cx="14763750" cy="723900"/>
+            <a:off x="6358890" y="4171950"/>
+            <a:ext cx="5212080" cy="647700"/>
           </a:xfrm>
           <a:prstGeom prst="rect">
             <a:avLst/>
@@ -12088,31 +13043,10 @@
           </a:bodyPr>
           <a:lstStyle/>
           <a:p>
-            <a:pPr>
-              <a:lnSpc>
-                <a:spcPct val="120000"/>
-              </a:lnSpc>
-            </a:pPr>
-            <a:r>
-              <a:rPr sz="2175" b="1">
-                <a:solidFill>
-                  <a:srgbClr val="0D2B5E"/>
-                </a:solidFill>
-                <a:latin typeface="Pretendard"/>
-                <a:ea typeface="Pretendard"/>
-                <a:cs typeface="Pretendard"/>
-              </a:rPr>
-              <a:t>원천에 삭제가 오면요?</a:t>
-            </a:r>
-          </a:p>
-          <a:p>
-            <a:pPr>
-              <a:lnSpc>
-                <a:spcPct val="130000"/>
-              </a:lnSpc>
-              <a:spcBef>
-                <a:spcPts val="300"/>
-              </a:spcBef>
+            <a:pPr algn="ctr">
+              <a:lnSpc>
+                <a:spcPct val="115000"/>
+              </a:lnSpc>
             </a:pPr>
             <a:r>
               <a:rPr sz="1875" b="0">
@@ -12123,25 +13057,43 @@
                 <a:ea typeface="Pretendard"/>
                 <a:cs typeface="Pretendard"/>
               </a:rPr>
-              <a:t>WHEN MATCHED AND s.op = 'D' THEN DELETE 를 붙인다 — 6주차 CDC 에서</a:t>
-            </a:r>
-          </a:p>
-        </p:txBody>
-      </p:sp>
-      <p:sp>
-        <p:nvSpPr>
-          <p:cNvPr id="23" name="Rounded Rectangle 22"/>
-          <p:cNvSpPr/>
-          <p:nvPr/>
-        </p:nvSpPr>
-        <p:spPr>
-          <a:xfrm>
-            <a:off x="1143000" y="6496050"/>
-            <a:ext cx="16002000" cy="914400"/>
+              <a:t>원천에 같은 order_id</a:t>
+            </a:r>
+          </a:p>
+          <a:p>
+            <a:pPr algn="ctr">
+              <a:lnSpc>
+                <a:spcPct val="115000"/>
+              </a:lnSpc>
+            </a:pPr>
+            <a:r>
+              <a:rPr sz="1875" b="0">
+                <a:solidFill>
+                  <a:srgbClr val="3D3D3D"/>
+                </a:solidFill>
+                <a:latin typeface="Pretendard"/>
+                <a:ea typeface="Pretendard"/>
+                <a:cs typeface="Pretendard"/>
+              </a:rPr>
+              <a:t>여러 행</a:t>
+            </a:r>
+          </a:p>
+        </p:txBody>
+      </p:sp>
+      <p:sp>
+        <p:nvSpPr>
+          <p:cNvPr id="24" name="Rounded Rectangle 23"/>
+          <p:cNvSpPr/>
+          <p:nvPr/>
+        </p:nvSpPr>
+        <p:spPr>
+          <a:xfrm>
+            <a:off x="11704320" y="4171950"/>
+            <a:ext cx="5440680" cy="647700"/>
           </a:xfrm>
           <a:prstGeom prst="roundRect">
             <a:avLst>
-              <a:gd name="adj" fmla="val 5208"/>
+              <a:gd name="adj" fmla="val 5882"/>
             </a:avLst>
           </a:prstGeom>
           <a:solidFill>
@@ -12164,74 +13116,352 @@
       </p:sp>
       <p:sp>
         <p:nvSpPr>
-          <p:cNvPr id="24" name="Rectangle 23"/>
-          <p:cNvSpPr/>
-          <p:nvPr/>
-        </p:nvSpPr>
-        <p:spPr>
-          <a:xfrm>
-            <a:off x="1143000" y="6496050"/>
-            <a:ext cx="47625" cy="914400"/>
-          </a:xfrm>
-          <a:prstGeom prst="rect">
-            <a:avLst/>
-          </a:prstGeom>
-          <a:solidFill>
-            <a:srgbClr val="1E5BC6"/>
-          </a:solidFill>
-          <a:ln>
-            <a:noFill/>
-          </a:ln>
-          <a:effectLst/>
-        </p:spPr>
-        <p:txBody>
-          <a:bodyPr rtlCol="0" anchor="ctr" wrap="square"/>
-          <a:lstStyle/>
-          <a:p>
-            <a:pPr algn="ctr"/>
-          </a:p>
-        </p:txBody>
-      </p:sp>
-      <p:sp>
-        <p:nvSpPr>
-          <p:cNvPr id="25" name="Oval 24"/>
-          <p:cNvSpPr/>
-          <p:nvPr/>
-        </p:nvSpPr>
-        <p:spPr>
-          <a:xfrm>
-            <a:off x="1428750" y="6743700"/>
-            <a:ext cx="419100" cy="419100"/>
-          </a:xfrm>
-          <a:prstGeom prst="ellipse">
-            <a:avLst/>
-          </a:prstGeom>
-          <a:solidFill>
-            <a:srgbClr val="0D2B5E"/>
-          </a:solidFill>
-          <a:ln>
-            <a:noFill/>
-          </a:ln>
-          <a:effectLst/>
-        </p:spPr>
-        <p:txBody>
-          <a:bodyPr rtlCol="0" anchor="ctr" wrap="square"/>
-          <a:lstStyle/>
-          <a:p>
-            <a:pPr algn="ctr"/>
-          </a:p>
-        </p:txBody>
-      </p:sp>
-      <p:sp>
-        <p:nvSpPr>
-          <p:cNvPr id="26" name="TextBox 25"/>
+          <p:cNvPr id="25" name="TextBox 24"/>
           <p:cNvSpPr txBox="1"/>
           <p:nvPr/>
         </p:nvSpPr>
         <p:spPr>
           <a:xfrm>
-            <a:off x="1428750" y="6810375"/>
-            <a:ext cx="419100" cy="304800"/>
+            <a:off x="11799570" y="4171950"/>
+            <a:ext cx="5250180" cy="647700"/>
+          </a:xfrm>
+          <a:prstGeom prst="rect">
+            <a:avLst/>
+          </a:prstGeom>
+          <a:noFill/>
+        </p:spPr>
+        <p:txBody>
+          <a:bodyPr wrap="square" lIns="0" rIns="0" tIns="0" bIns="0" anchor="ctr">
+            <a:spAutoFit/>
+          </a:bodyPr>
+          <a:lstStyle/>
+          <a:p>
+            <a:pPr algn="ctr">
+              <a:lnSpc>
+                <a:spcPct val="115000"/>
+              </a:lnSpc>
+            </a:pPr>
+            <a:r>
+              <a:rPr sz="1875" b="0">
+                <a:solidFill>
+                  <a:srgbClr val="3D3D3D"/>
+                </a:solidFill>
+                <a:latin typeface="Pretendard"/>
+                <a:ea typeface="Pretendard"/>
+                <a:cs typeface="Pretendard"/>
+              </a:rPr>
+              <a:t>MERGE 전 ROW_NUMBER</a:t>
+            </a:r>
+          </a:p>
+          <a:p>
+            <a:pPr algn="ctr">
+              <a:lnSpc>
+                <a:spcPct val="115000"/>
+              </a:lnSpc>
+            </a:pPr>
+            <a:r>
+              <a:rPr sz="1875" b="0">
+                <a:solidFill>
+                  <a:srgbClr val="3D3D3D"/>
+                </a:solidFill>
+                <a:latin typeface="Pretendard"/>
+                <a:ea typeface="Pretendard"/>
+                <a:cs typeface="Pretendard"/>
+              </a:rPr>
+              <a:t>로 키별 한 행만</a:t>
+            </a:r>
+          </a:p>
+        </p:txBody>
+      </p:sp>
+      <p:sp>
+        <p:nvSpPr>
+          <p:cNvPr id="26" name="Rounded Rectangle 25"/>
+          <p:cNvSpPr/>
+          <p:nvPr/>
+        </p:nvSpPr>
+        <p:spPr>
+          <a:xfrm>
+            <a:off x="1143000" y="4895850"/>
+            <a:ext cx="5082540" cy="647700"/>
+          </a:xfrm>
+          <a:prstGeom prst="roundRect">
+            <a:avLst>
+              <a:gd name="adj" fmla="val 5882"/>
+            </a:avLst>
+          </a:prstGeom>
+          <a:solidFill>
+            <a:srgbClr val="EDF3FD"/>
+          </a:solidFill>
+          <a:ln w="9525">
+            <a:solidFill>
+              <a:srgbClr val="BFD3F5"/>
+            </a:solidFill>
+          </a:ln>
+          <a:effectLst/>
+        </p:spPr>
+        <p:txBody>
+          <a:bodyPr rtlCol="0" anchor="ctr" wrap="square"/>
+          <a:lstStyle/>
+          <a:p>
+            <a:pPr algn="ctr"/>
+          </a:p>
+        </p:txBody>
+      </p:sp>
+      <p:sp>
+        <p:nvSpPr>
+          <p:cNvPr id="27" name="TextBox 26"/>
+          <p:cNvSpPr txBox="1"/>
+          <p:nvPr/>
+        </p:nvSpPr>
+        <p:spPr>
+          <a:xfrm>
+            <a:off x="1238250" y="4895850"/>
+            <a:ext cx="4892040" cy="647700"/>
+          </a:xfrm>
+          <a:prstGeom prst="rect">
+            <a:avLst/>
+          </a:prstGeom>
+          <a:noFill/>
+        </p:spPr>
+        <p:txBody>
+          <a:bodyPr wrap="square" lIns="0" rIns="0" tIns="0" bIns="0" anchor="ctr">
+            <a:spAutoFit/>
+          </a:bodyPr>
+          <a:lstStyle/>
+          <a:p>
+            <a:pPr algn="l">
+              <a:lnSpc>
+                <a:spcPct val="115000"/>
+              </a:lnSpc>
+            </a:pPr>
+            <a:r>
+              <a:rPr sz="1875" b="1">
+                <a:solidFill>
+                  <a:srgbClr val="0D2B5E"/>
+                </a:solidFill>
+                <a:latin typeface="Pretendard"/>
+                <a:ea typeface="Pretendard"/>
+                <a:cs typeface="Pretendard"/>
+              </a:rPr>
+              <a:t>실행마다 결과가</a:t>
+            </a:r>
+          </a:p>
+          <a:p>
+            <a:pPr algn="l">
+              <a:lnSpc>
+                <a:spcPct val="115000"/>
+              </a:lnSpc>
+            </a:pPr>
+            <a:r>
+              <a:rPr sz="1875" b="1">
+                <a:solidFill>
+                  <a:srgbClr val="0D2B5E"/>
+                </a:solidFill>
+                <a:latin typeface="Pretendard"/>
+                <a:ea typeface="Pretendard"/>
+                <a:cs typeface="Pretendard"/>
+              </a:rPr>
+              <a:t>미묘하게 다름</a:t>
+            </a:r>
+          </a:p>
+        </p:txBody>
+      </p:sp>
+      <p:sp>
+        <p:nvSpPr>
+          <p:cNvPr id="28" name="Rounded Rectangle 27"/>
+          <p:cNvSpPr/>
+          <p:nvPr/>
+        </p:nvSpPr>
+        <p:spPr>
+          <a:xfrm>
+            <a:off x="6263640" y="4895850"/>
+            <a:ext cx="5402580" cy="647700"/>
+          </a:xfrm>
+          <a:prstGeom prst="roundRect">
+            <a:avLst>
+              <a:gd name="adj" fmla="val 5882"/>
+            </a:avLst>
+          </a:prstGeom>
+          <a:solidFill>
+            <a:srgbClr val="FAFBFD"/>
+          </a:solidFill>
+          <a:ln w="9525">
+            <a:solidFill>
+              <a:srgbClr val="DCE1E8"/>
+            </a:solidFill>
+          </a:ln>
+          <a:effectLst/>
+        </p:spPr>
+        <p:txBody>
+          <a:bodyPr rtlCol="0" anchor="ctr" wrap="square"/>
+          <a:lstStyle/>
+          <a:p>
+            <a:pPr algn="ctr"/>
+          </a:p>
+        </p:txBody>
+      </p:sp>
+      <p:sp>
+        <p:nvSpPr>
+          <p:cNvPr id="29" name="TextBox 28"/>
+          <p:cNvSpPr txBox="1"/>
+          <p:nvPr/>
+        </p:nvSpPr>
+        <p:spPr>
+          <a:xfrm>
+            <a:off x="6358890" y="4895850"/>
+            <a:ext cx="5212080" cy="647700"/>
+          </a:xfrm>
+          <a:prstGeom prst="rect">
+            <a:avLst/>
+          </a:prstGeom>
+          <a:noFill/>
+        </p:spPr>
+        <p:txBody>
+          <a:bodyPr wrap="square" lIns="0" rIns="0" tIns="0" bIns="0" anchor="ctr">
+            <a:spAutoFit/>
+          </a:bodyPr>
+          <a:lstStyle/>
+          <a:p>
+            <a:pPr algn="ctr">
+              <a:lnSpc>
+                <a:spcPct val="115000"/>
+              </a:lnSpc>
+            </a:pPr>
+            <a:r>
+              <a:rPr sz="1875" b="0">
+                <a:solidFill>
+                  <a:srgbClr val="3D3D3D"/>
+                </a:solidFill>
+                <a:latin typeface="Pretendard"/>
+                <a:ea typeface="Pretendard"/>
+                <a:cs typeface="Pretendard"/>
+              </a:rPr>
+              <a:t>순서 없는 중복 제거</a:t>
+            </a:r>
+          </a:p>
+          <a:p>
+            <a:pPr algn="ctr">
+              <a:lnSpc>
+                <a:spcPct val="115000"/>
+              </a:lnSpc>
+            </a:pPr>
+            <a:r>
+              <a:rPr sz="1875" b="0">
+                <a:solidFill>
+                  <a:srgbClr val="3D3D3D"/>
+                </a:solidFill>
+                <a:latin typeface="Pretendard"/>
+                <a:ea typeface="Pretendard"/>
+                <a:cs typeface="Pretendard"/>
+              </a:rPr>
+              <a:t>(dropDuplicates)</a:t>
+            </a:r>
+          </a:p>
+        </p:txBody>
+      </p:sp>
+      <p:sp>
+        <p:nvSpPr>
+          <p:cNvPr id="30" name="Rounded Rectangle 29"/>
+          <p:cNvSpPr/>
+          <p:nvPr/>
+        </p:nvSpPr>
+        <p:spPr>
+          <a:xfrm>
+            <a:off x="11704320" y="4895850"/>
+            <a:ext cx="5440680" cy="647700"/>
+          </a:xfrm>
+          <a:prstGeom prst="roundRect">
+            <a:avLst>
+              <a:gd name="adj" fmla="val 5882"/>
+            </a:avLst>
+          </a:prstGeom>
+          <a:solidFill>
+            <a:srgbClr val="FAFBFD"/>
+          </a:solidFill>
+          <a:ln w="9525">
+            <a:solidFill>
+              <a:srgbClr val="DCE1E8"/>
+            </a:solidFill>
+          </a:ln>
+          <a:effectLst/>
+        </p:spPr>
+        <p:txBody>
+          <a:bodyPr rtlCol="0" anchor="ctr" wrap="square"/>
+          <a:lstStyle/>
+          <a:p>
+            <a:pPr algn="ctr"/>
+          </a:p>
+        </p:txBody>
+      </p:sp>
+      <p:sp>
+        <p:nvSpPr>
+          <p:cNvPr id="31" name="TextBox 30"/>
+          <p:cNvSpPr txBox="1"/>
+          <p:nvPr/>
+        </p:nvSpPr>
+        <p:spPr>
+          <a:xfrm>
+            <a:off x="11799570" y="4895850"/>
+            <a:ext cx="5250180" cy="647700"/>
+          </a:xfrm>
+          <a:prstGeom prst="rect">
+            <a:avLst/>
+          </a:prstGeom>
+          <a:noFill/>
+        </p:spPr>
+        <p:txBody>
+          <a:bodyPr wrap="square" lIns="0" rIns="0" tIns="0" bIns="0" anchor="ctr">
+            <a:spAutoFit/>
+          </a:bodyPr>
+          <a:lstStyle/>
+          <a:p>
+            <a:pPr algn="ctr">
+              <a:lnSpc>
+                <a:spcPct val="115000"/>
+              </a:lnSpc>
+            </a:pPr>
+            <a:r>
+              <a:rPr sz="1875" b="0">
+                <a:solidFill>
+                  <a:srgbClr val="3D3D3D"/>
+                </a:solidFill>
+                <a:latin typeface="Pretendard"/>
+                <a:ea typeface="Pretendard"/>
+                <a:cs typeface="Pretendard"/>
+              </a:rPr>
+              <a:t>Window + row_number</a:t>
+            </a:r>
+          </a:p>
+          <a:p>
+            <a:pPr algn="ctr">
+              <a:lnSpc>
+                <a:spcPct val="115000"/>
+              </a:lnSpc>
+            </a:pPr>
+            <a:r>
+              <a:rPr sz="1875" b="0">
+                <a:solidFill>
+                  <a:srgbClr val="3D3D3D"/>
+                </a:solidFill>
+                <a:latin typeface="Pretendard"/>
+                <a:ea typeface="Pretendard"/>
+                <a:cs typeface="Pretendard"/>
+              </a:rPr>
+              <a:t>로 규칙 명시</a:t>
+            </a:r>
+          </a:p>
+        </p:txBody>
+      </p:sp>
+      <p:sp>
+        <p:nvSpPr>
+          <p:cNvPr id="32" name="TextBox 31"/>
+          <p:cNvSpPr txBox="1"/>
+          <p:nvPr/>
+        </p:nvSpPr>
+        <p:spPr>
+          <a:xfrm>
+            <a:off x="1143000" y="7620000"/>
+            <a:ext cx="16002000" cy="342900"/>
           </a:xfrm>
           <a:prstGeom prst="rect">
             <a:avLst/>
@@ -12244,7 +13474,7 @@
           </a:bodyPr>
           <a:lstStyle/>
           <a:p>
-            <a:pPr algn="ctr">
+            <a:pPr algn="l">
               <a:lnSpc>
                 <a:spcPct val="100000"/>
               </a:lnSpc>
@@ -12252,82 +13482,20 @@
             <a:r>
               <a:rPr sz="1875" b="1">
                 <a:solidFill>
-                  <a:srgbClr val="FFFFFF"/>
-                </a:solidFill>
-                <a:latin typeface="Pretendard"/>
-                <a:ea typeface="Pretendard"/>
-                <a:cs typeface="Pretendard"/>
-              </a:rPr>
-              <a:t>4</a:t>
-            </a:r>
-          </a:p>
-        </p:txBody>
-      </p:sp>
-      <p:sp>
-        <p:nvSpPr>
-          <p:cNvPr id="27" name="TextBox 26"/>
-          <p:cNvSpPr txBox="1"/>
-          <p:nvPr/>
-        </p:nvSpPr>
-        <p:spPr>
-          <a:xfrm>
-            <a:off x="2057400" y="6591300"/>
-            <a:ext cx="14763750" cy="723900"/>
-          </a:xfrm>
-          <a:prstGeom prst="rect">
-            <a:avLst/>
-          </a:prstGeom>
-          <a:noFill/>
-        </p:spPr>
-        <p:txBody>
-          <a:bodyPr wrap="square" lIns="0" rIns="0" tIns="0" bIns="0" anchor="ctr">
-            <a:spAutoFit/>
-          </a:bodyPr>
-          <a:lstStyle/>
-          <a:p>
-            <a:pPr>
-              <a:lnSpc>
-                <a:spcPct val="120000"/>
-              </a:lnSpc>
-            </a:pPr>
-            <a:r>
-              <a:rPr sz="2175" b="1">
-                <a:solidFill>
-                  <a:srgbClr val="0D2B5E"/>
-                </a:solidFill>
-                <a:latin typeface="Pretendard"/>
-                <a:ea typeface="Pretendard"/>
-                <a:cs typeface="Pretendard"/>
-              </a:rPr>
-              <a:t>불량 행을 그냥 버려도 되나요?</a:t>
-            </a:r>
-          </a:p>
-          <a:p>
-            <a:pPr>
-              <a:lnSpc>
-                <a:spcPct val="130000"/>
-              </a:lnSpc>
-              <a:spcBef>
-                <a:spcPts val="300"/>
-              </a:spcBef>
-            </a:pPr>
-            <a:r>
-              <a:rPr sz="1875" b="0">
-                <a:solidFill>
-                  <a:srgbClr val="3D3D3D"/>
-                </a:solidFill>
-                <a:latin typeface="Pretendard"/>
-                <a:ea typeface="Pretendard"/>
-                <a:cs typeface="Pretendard"/>
-              </a:rPr>
-              <a:t>권하지 않는다 — 별도 테이블에 남겨 두면 「왜 건수가 안 맞나」를 나중에 설명할 수 있다</a:t>
-            </a:r>
-          </a:p>
-        </p:txBody>
-      </p:sp>
-      <p:sp>
-        <p:nvSpPr>
-          <p:cNvPr id="28" name="Rectangle 27"/>
+                  <a:srgbClr val="7D7D7D"/>
+                </a:solidFill>
+                <a:latin typeface="Pretendard"/>
+                <a:ea typeface="Pretendard"/>
+                <a:cs typeface="Pretendard"/>
+              </a:rPr>
+              <a:t>dropDuplicates 는 어느 행이 남을지 보장하지 않는다 — 규칙을 명시해야 실행마다 같은 결과</a:t>
+            </a:r>
+          </a:p>
+        </p:txBody>
+      </p:sp>
+      <p:sp>
+        <p:nvSpPr>
+          <p:cNvPr id="33" name="Rectangle 32"/>
           <p:cNvSpPr/>
           <p:nvPr/>
         </p:nvSpPr>
@@ -12357,7 +13525,7 @@
       </p:sp>
       <p:sp>
         <p:nvSpPr>
-          <p:cNvPr id="29" name="TextBox 28"/>
+          <p:cNvPr id="34" name="TextBox 33"/>
           <p:cNvSpPr txBox="1"/>
           <p:nvPr/>
         </p:nvSpPr>
@@ -12398,7 +13566,7 @@
       </p:sp>
       <p:sp>
         <p:nvSpPr>
-          <p:cNvPr id="30" name="TextBox 29"/>
+          <p:cNvPr id="35" name="TextBox 34"/>
           <p:cNvSpPr txBox="1"/>
           <p:nvPr/>
         </p:nvSpPr>
@@ -12457,7 +13625,7 @@
       <p:grpSpPr/>
       <p:sp>
         <p:nvSpPr>
-          <p:cNvPr id="2" name="Oval 1"/>
+          <p:cNvPr id="2" name="deckgen:decor"/>
           <p:cNvSpPr/>
           <p:nvPr/>
         </p:nvSpPr>
@@ -12487,7 +13655,7 @@
       </p:sp>
       <p:sp>
         <p:nvSpPr>
-          <p:cNvPr id="3" name="Oval 2"/>
+          <p:cNvPr id="3" name="deckgen:decor"/>
           <p:cNvSpPr/>
           <p:nvPr/>
         </p:nvSpPr>
@@ -12517,7 +13685,7 @@
       </p:sp>
       <p:sp>
         <p:nvSpPr>
-          <p:cNvPr id="4" name="Oval 3"/>
+          <p:cNvPr id="4" name="deckgen:decor"/>
           <p:cNvSpPr/>
           <p:nvPr/>
         </p:nvSpPr>
@@ -12581,7 +13749,7 @@
                 <a:ea typeface="Pretendard"/>
                 <a:cs typeface="Pretendard"/>
               </a:rPr>
-              <a:t>심화 과제 (선택)</a:t>
+              <a:t>예상 질문</a:t>
             </a:r>
           </a:p>
         </p:txBody>
@@ -12622,7 +13790,7 @@
                 <a:ea typeface="Pretendard"/>
                 <a:cs typeface="Pretendard"/>
               </a:rPr>
-              <a:t>더 해 보고 싶다면</a:t>
+              <a:t>자주 나오는 질문 네 가지</a:t>
             </a:r>
           </a:p>
         </p:txBody>
@@ -12828,7 +13996,7 @@
                 <a:ea typeface="Pretendard"/>
                 <a:cs typeface="Pretendard"/>
               </a:rPr>
-              <a:t>격리 테이블</a:t>
+              <a:t>매번 랜딩 존 전체를 읽으면 느리지 않나요?</a:t>
             </a:r>
           </a:p>
           <a:p>
@@ -12849,7 +14017,7 @@
                 <a:ea typeface="Pretendard"/>
                 <a:cs typeface="Pretendard"/>
               </a:rPr>
-              <a:t>걸러진 불량 행을 demo.lakehouse.orders_rejected 에 따로 적재 — 3-5 품질 리포트와 같은 발상</a:t>
+              <a:t>느려진다 — 날짜 파티션 경로만 읽거나 처리한 파일을 다른 접두사로 옮긴다. 8주차 Airflow 에서</a:t>
             </a:r>
           </a:p>
         </p:txBody>
@@ -13025,7 +14193,7 @@
                 <a:ea typeface="Pretendard"/>
                 <a:cs typeface="Pretendard"/>
               </a:rPr>
-              <a:t>컴팩션</a:t>
+              <a:t>MERGE 대신 INSERT OVERWRITE 는요?</a:t>
             </a:r>
           </a:p>
           <a:p>
@@ -13046,7 +14214,7 @@
                 <a:ea typeface="Pretendard"/>
                 <a:cs typeface="Pretendard"/>
               </a:rPr>
-              <a:t>CALL demo.system.rewrite_data_files 로 작은 파일을 합치고 files 메타테이블로 전후 비교</a:t>
+              <a:t>파티션 단위로 통째로 갈아 끼우는 방식이라 그것도 멱등 — 갱신 대상이 흩어져 있으면 MERGE 가 낫다</a:t>
             </a:r>
           </a:p>
         </p:txBody>
@@ -13222,7 +14390,7 @@
                 <a:ea typeface="Pretendard"/>
                 <a:cs typeface="Pretendard"/>
               </a:rPr>
-              <a:t>날짜 경로</a:t>
+              <a:t>원천에 삭제가 오면요?</a:t>
             </a:r>
           </a:p>
           <a:p>
@@ -13243,7 +14411,7 @@
                 <a:ea typeface="Pretendard"/>
                 <a:cs typeface="Pretendard"/>
               </a:rPr>
-              <a:t>랜딩 존을 dt=날짜 형태로 바꾸고 특정 날짜만 읽는 인자 추가</a:t>
+              <a:t>WHEN MATCHED AND s.op = 'D' THEN DELETE 를 붙인다 — 6주차 CDC 에서</a:t>
             </a:r>
           </a:p>
         </p:txBody>
@@ -13419,7 +14587,7 @@
                 <a:ea typeface="Pretendard"/>
                 <a:cs typeface="Pretendard"/>
               </a:rPr>
-              <a:t>「최신」의 기준 바꾸기</a:t>
+              <a:t>불량 행을 그냥 버려도 되나요?</a:t>
             </a:r>
           </a:p>
           <a:p>
@@ -13440,7 +14608,7 @@
                 <a:ea typeface="Pretendard"/>
                 <a:cs typeface="Pretendard"/>
               </a:rPr>
-              <a:t>order_date 대신 파일 이름으로 바꾸면 결과가 어떻게 달라지는지</a:t>
+              <a:t>권하지 않는다 — 별도 테이블에 남겨 두면 「왜 건수가 안 맞나」를 나중에 설명할 수 있다</a:t>
             </a:r>
           </a:p>
         </p:txBody>
@@ -13577,7 +14745,7 @@
       <p:grpSpPr/>
       <p:sp>
         <p:nvSpPr>
-          <p:cNvPr id="2" name="Oval 1"/>
+          <p:cNvPr id="2" name="deckgen:decor"/>
           <p:cNvSpPr/>
           <p:nvPr/>
         </p:nvSpPr>
@@ -13607,7 +14775,7 @@
       </p:sp>
       <p:sp>
         <p:nvSpPr>
-          <p:cNvPr id="3" name="Oval 2"/>
+          <p:cNvPr id="3" name="deckgen:decor"/>
           <p:cNvSpPr/>
           <p:nvPr/>
         </p:nvSpPr>
@@ -13637,7 +14805,7 @@
       </p:sp>
       <p:sp>
         <p:nvSpPr>
-          <p:cNvPr id="4" name="Oval 3"/>
+          <p:cNvPr id="4" name="deckgen:decor"/>
           <p:cNvSpPr/>
           <p:nvPr/>
         </p:nvSpPr>
@@ -13701,7 +14869,7 @@
                 <a:ea typeface="Pretendard"/>
                 <a:cs typeface="Pretendard"/>
               </a:rPr>
-              <a:t>다음 회차 예고</a:t>
+              <a:t>심화 과제 (선택)</a:t>
             </a:r>
           </a:p>
         </p:txBody>
@@ -13742,7 +14910,7 @@
                 <a:ea typeface="Pretendard"/>
                 <a:cs typeface="Pretendard"/>
               </a:rPr>
-              <a:t>4-4 · Trino 기반 S3 SQL 엔진 구축</a:t>
+              <a:t>더 해 보고 싶다면</a:t>
             </a:r>
           </a:p>
         </p:txBody>
@@ -13785,12 +14953,12 @@
         </p:nvSpPr>
         <p:spPr>
           <a:xfrm>
-            <a:off x="1143000" y="3429000"/>
-            <a:ext cx="3714750" cy="2476500"/>
+            <a:off x="1143000" y="3352800"/>
+            <a:ext cx="16002000" cy="914400"/>
           </a:xfrm>
           <a:prstGeom prst="roundRect">
             <a:avLst>
-              <a:gd name="adj" fmla="val 1923"/>
+              <a:gd name="adj" fmla="val 5208"/>
             </a:avLst>
           </a:prstGeom>
           <a:solidFill>
@@ -13819,8 +14987,8 @@
         </p:nvSpPr>
         <p:spPr>
           <a:xfrm>
-            <a:off x="1143000" y="3429000"/>
-            <a:ext cx="3714750" cy="47625"/>
+            <a:off x="1143000" y="3352800"/>
+            <a:ext cx="47625" cy="914400"/>
           </a:xfrm>
           <a:prstGeom prst="rect">
             <a:avLst/>
@@ -13843,14 +15011,44 @@
       </p:sp>
       <p:sp>
         <p:nvSpPr>
-          <p:cNvPr id="10" name="TextBox 9"/>
+          <p:cNvPr id="10" name="Oval 9"/>
+          <p:cNvSpPr/>
+          <p:nvPr/>
+        </p:nvSpPr>
+        <p:spPr>
+          <a:xfrm>
+            <a:off x="1428750" y="3600450"/>
+            <a:ext cx="419100" cy="419100"/>
+          </a:xfrm>
+          <a:prstGeom prst="ellipse">
+            <a:avLst/>
+          </a:prstGeom>
+          <a:solidFill>
+            <a:srgbClr val="0D2B5E"/>
+          </a:solidFill>
+          <a:ln>
+            <a:noFill/>
+          </a:ln>
+          <a:effectLst/>
+        </p:spPr>
+        <p:txBody>
+          <a:bodyPr rtlCol="0" anchor="ctr" wrap="square"/>
+          <a:lstStyle/>
+          <a:p>
+            <a:pPr algn="ctr"/>
+          </a:p>
+        </p:txBody>
+      </p:sp>
+      <p:sp>
+        <p:nvSpPr>
+          <p:cNvPr id="11" name="TextBox 10"/>
           <p:cNvSpPr txBox="1"/>
           <p:nvPr/>
         </p:nvSpPr>
         <p:spPr>
           <a:xfrm>
-            <a:off x="4000500" y="3638550"/>
-            <a:ext cx="590550" cy="400050"/>
+            <a:off x="1428750" y="3667125"/>
+            <a:ext cx="419100" cy="304800"/>
           </a:xfrm>
           <a:prstGeom prst="rect">
             <a:avLst/>
@@ -13863,35 +15061,35 @@
           </a:bodyPr>
           <a:lstStyle/>
           <a:p>
-            <a:pPr algn="r">
+            <a:pPr algn="ctr">
               <a:lnSpc>
                 <a:spcPct val="100000"/>
               </a:lnSpc>
             </a:pPr>
             <a:r>
-              <a:rPr sz="2550" b="1">
-                <a:solidFill>
-                  <a:srgbClr val="E4EBF4"/>
-                </a:solidFill>
-                <a:latin typeface="Pretendard"/>
-                <a:ea typeface="Pretendard"/>
-                <a:cs typeface="Pretendard"/>
-              </a:rPr>
-              <a:t>01</a:t>
-            </a:r>
-          </a:p>
-        </p:txBody>
-      </p:sp>
-      <p:sp>
-        <p:nvSpPr>
-          <p:cNvPr id="11" name="TextBox 10"/>
+              <a:rPr sz="1875" b="1">
+                <a:solidFill>
+                  <a:srgbClr val="FFFFFF"/>
+                </a:solidFill>
+                <a:latin typeface="Pretendard"/>
+                <a:ea typeface="Pretendard"/>
+                <a:cs typeface="Pretendard"/>
+              </a:rPr>
+              <a:t>1</a:t>
+            </a:r>
+          </a:p>
+        </p:txBody>
+      </p:sp>
+      <p:sp>
+        <p:nvSpPr>
+          <p:cNvPr id="12" name="TextBox 11"/>
           <p:cNvSpPr txBox="1"/>
           <p:nvPr/>
         </p:nvSpPr>
         <p:spPr>
           <a:xfrm>
-            <a:off x="1466850" y="3752850"/>
-            <a:ext cx="3067050" cy="1828800"/>
+            <a:off x="2057400" y="3448050"/>
+            <a:ext cx="14763750" cy="723900"/>
           </a:xfrm>
           <a:prstGeom prst="rect">
             <a:avLst/>
@@ -13906,11 +15104,11 @@
           <a:p>
             <a:pPr>
               <a:lnSpc>
-                <a:spcPct val="115000"/>
-              </a:lnSpc>
-            </a:pPr>
-            <a:r>
-              <a:rPr sz="2700" b="1">
+                <a:spcPct val="120000"/>
+              </a:lnSpc>
+            </a:pPr>
+            <a:r>
+              <a:rPr sz="2175" b="1">
                 <a:solidFill>
                   <a:srgbClr val="0D2B5E"/>
                 </a:solidFill>
@@ -13918,20 +15116,20 @@
                 <a:ea typeface="Pretendard"/>
                 <a:cs typeface="Pretendard"/>
               </a:rPr>
-              <a:t>이론 1H</a:t>
+              <a:t>격리 테이블</a:t>
             </a:r>
           </a:p>
           <a:p>
             <a:pPr>
               <a:lnSpc>
-                <a:spcPct val="146000"/>
+                <a:spcPct val="130000"/>
               </a:lnSpc>
               <a:spcBef>
-                <a:spcPts val="1050"/>
+                <a:spcPts val="300"/>
               </a:spcBef>
             </a:pPr>
             <a:r>
-              <a:rPr sz="2025" b="0">
+              <a:rPr sz="1875" b="0">
                 <a:solidFill>
                   <a:srgbClr val="3D3D3D"/>
                 </a:solidFill>
@@ -13939,228 +15137,25 @@
                 <a:ea typeface="Pretendard"/>
                 <a:cs typeface="Pretendard"/>
               </a:rPr>
-              <a:t>분산 SQL 엔진의 이해</a:t>
-            </a:r>
-          </a:p>
-          <a:p>
-            <a:pPr>
-              <a:lnSpc>
-                <a:spcPct val="146000"/>
-              </a:lnSpc>
-            </a:pPr>
-            <a:r>
-              <a:rPr sz="2025" b="0">
-                <a:solidFill>
-                  <a:srgbClr val="3D3D3D"/>
-                </a:solidFill>
-                <a:latin typeface="Pretendard"/>
-                <a:ea typeface="Pretendard"/>
-                <a:cs typeface="Pretendard"/>
-              </a:rPr>
-              <a:t>코디네이터·워커</a:t>
-            </a:r>
-          </a:p>
-        </p:txBody>
-      </p:sp>
-      <p:sp>
-        <p:nvSpPr>
-          <p:cNvPr id="12" name="Rounded Rectangle 11"/>
-          <p:cNvSpPr/>
-          <p:nvPr/>
-        </p:nvSpPr>
-        <p:spPr>
-          <a:xfrm>
-            <a:off x="5238750" y="3429000"/>
-            <a:ext cx="3714750" cy="2476500"/>
+              <a:t>걸러진 불량 행을 demo.lakehouse.orders_rejected 에 따로 적재 — 3-5 품질 리포트와 같은 발상</a:t>
+            </a:r>
+          </a:p>
+        </p:txBody>
+      </p:sp>
+      <p:sp>
+        <p:nvSpPr>
+          <p:cNvPr id="13" name="Rounded Rectangle 12"/>
+          <p:cNvSpPr/>
+          <p:nvPr/>
+        </p:nvSpPr>
+        <p:spPr>
+          <a:xfrm>
+            <a:off x="1143000" y="4400550"/>
+            <a:ext cx="16002000" cy="914400"/>
           </a:xfrm>
           <a:prstGeom prst="roundRect">
             <a:avLst>
-              <a:gd name="adj" fmla="val 1923"/>
-            </a:avLst>
-          </a:prstGeom>
-          <a:solidFill>
-            <a:srgbClr val="0D2B5E"/>
-          </a:solidFill>
-          <a:ln w="9525">
-            <a:solidFill>
-              <a:srgbClr val="0D2B5E"/>
-            </a:solidFill>
-          </a:ln>
-          <a:effectLst/>
-        </p:spPr>
-        <p:txBody>
-          <a:bodyPr rtlCol="0" anchor="ctr" wrap="square"/>
-          <a:lstStyle/>
-          <a:p>
-            <a:pPr algn="ctr"/>
-          </a:p>
-        </p:txBody>
-      </p:sp>
-      <p:sp>
-        <p:nvSpPr>
-          <p:cNvPr id="13" name="Rectangle 12"/>
-          <p:cNvSpPr/>
-          <p:nvPr/>
-        </p:nvSpPr>
-        <p:spPr>
-          <a:xfrm>
-            <a:off x="5238750" y="3429000"/>
-            <a:ext cx="3714750" cy="47625"/>
-          </a:xfrm>
-          <a:prstGeom prst="rect">
-            <a:avLst/>
-          </a:prstGeom>
-          <a:solidFill>
-            <a:srgbClr val="1E5BC6"/>
-          </a:solidFill>
-          <a:ln>
-            <a:noFill/>
-          </a:ln>
-          <a:effectLst/>
-        </p:spPr>
-        <p:txBody>
-          <a:bodyPr rtlCol="0" anchor="ctr" wrap="square"/>
-          <a:lstStyle/>
-          <a:p>
-            <a:pPr algn="ctr"/>
-          </a:p>
-        </p:txBody>
-      </p:sp>
-      <p:sp>
-        <p:nvSpPr>
-          <p:cNvPr id="14" name="TextBox 13"/>
-          <p:cNvSpPr txBox="1"/>
-          <p:nvPr/>
-        </p:nvSpPr>
-        <p:spPr>
-          <a:xfrm>
-            <a:off x="8096250" y="3638550"/>
-            <a:ext cx="590550" cy="400050"/>
-          </a:xfrm>
-          <a:prstGeom prst="rect">
-            <a:avLst/>
-          </a:prstGeom>
-          <a:noFill/>
-        </p:spPr>
-        <p:txBody>
-          <a:bodyPr wrap="square" lIns="0" rIns="0" tIns="0" bIns="0" anchor="t">
-            <a:spAutoFit/>
-          </a:bodyPr>
-          <a:lstStyle/>
-          <a:p>
-            <a:pPr algn="r">
-              <a:lnSpc>
-                <a:spcPct val="100000"/>
-              </a:lnSpc>
-            </a:pPr>
-            <a:r>
-              <a:rPr sz="2550" b="1">
-                <a:solidFill>
-                  <a:srgbClr val="3B4B7C"/>
-                </a:solidFill>
-                <a:latin typeface="Pretendard"/>
-                <a:ea typeface="Pretendard"/>
-                <a:cs typeface="Pretendard"/>
-              </a:rPr>
-              <a:t>02</a:t>
-            </a:r>
-          </a:p>
-        </p:txBody>
-      </p:sp>
-      <p:sp>
-        <p:nvSpPr>
-          <p:cNvPr id="15" name="TextBox 14"/>
-          <p:cNvSpPr txBox="1"/>
-          <p:nvPr/>
-        </p:nvSpPr>
-        <p:spPr>
-          <a:xfrm>
-            <a:off x="5562600" y="3752850"/>
-            <a:ext cx="3067050" cy="1828800"/>
-          </a:xfrm>
-          <a:prstGeom prst="rect">
-            <a:avLst/>
-          </a:prstGeom>
-          <a:noFill/>
-        </p:spPr>
-        <p:txBody>
-          <a:bodyPr wrap="square" lIns="0" rIns="0" tIns="0" bIns="0" anchor="ctr">
-            <a:spAutoFit/>
-          </a:bodyPr>
-          <a:lstStyle/>
-          <a:p>
-            <a:pPr>
-              <a:lnSpc>
-                <a:spcPct val="115000"/>
-              </a:lnSpc>
-            </a:pPr>
-            <a:r>
-              <a:rPr sz="2700" b="1">
-                <a:solidFill>
-                  <a:srgbClr val="FFFFFF"/>
-                </a:solidFill>
-                <a:latin typeface="Pretendard"/>
-                <a:ea typeface="Pretendard"/>
-                <a:cs typeface="Pretendard"/>
-              </a:rPr>
-              <a:t>실습 1.5H</a:t>
-            </a:r>
-          </a:p>
-          <a:p>
-            <a:pPr>
-              <a:lnSpc>
-                <a:spcPct val="146000"/>
-              </a:lnSpc>
-              <a:spcBef>
-                <a:spcPts val="1050"/>
-              </a:spcBef>
-            </a:pPr>
-            <a:r>
-              <a:rPr sz="2025" b="0">
-                <a:solidFill>
-                  <a:srgbClr val="D9E2F0"/>
-                </a:solidFill>
-                <a:latin typeface="Pretendard"/>
-                <a:ea typeface="Pretendard"/>
-                <a:cs typeface="Pretendard"/>
-              </a:rPr>
-              <a:t>Trino 컨테이너와</a:t>
-            </a:r>
-          </a:p>
-          <a:p>
-            <a:pPr>
-              <a:lnSpc>
-                <a:spcPct val="146000"/>
-              </a:lnSpc>
-            </a:pPr>
-            <a:r>
-              <a:rPr sz="2025" b="0">
-                <a:solidFill>
-                  <a:srgbClr val="D9E2F0"/>
-                </a:solidFill>
-                <a:latin typeface="Pretendard"/>
-                <a:ea typeface="Pretendard"/>
-                <a:cs typeface="Pretendard"/>
-              </a:rPr>
-              <a:t>카탈로그 연결</a:t>
-            </a:r>
-          </a:p>
-        </p:txBody>
-      </p:sp>
-      <p:sp>
-        <p:nvSpPr>
-          <p:cNvPr id="16" name="Rounded Rectangle 15"/>
-          <p:cNvSpPr/>
-          <p:nvPr/>
-        </p:nvSpPr>
-        <p:spPr>
-          <a:xfrm>
-            <a:off x="9334500" y="3429000"/>
-            <a:ext cx="3714750" cy="2476500"/>
-          </a:xfrm>
-          <a:prstGeom prst="roundRect">
-            <a:avLst>
-              <a:gd name="adj" fmla="val 1923"/>
+              <a:gd name="adj" fmla="val 5208"/>
             </a:avLst>
           </a:prstGeom>
           <a:solidFill>
@@ -14183,14 +15178,14 @@
       </p:sp>
       <p:sp>
         <p:nvSpPr>
-          <p:cNvPr id="17" name="Rectangle 16"/>
-          <p:cNvSpPr/>
-          <p:nvPr/>
-        </p:nvSpPr>
-        <p:spPr>
-          <a:xfrm>
-            <a:off x="9334500" y="3429000"/>
-            <a:ext cx="3714750" cy="47625"/>
+          <p:cNvPr id="14" name="Rectangle 13"/>
+          <p:cNvSpPr/>
+          <p:nvPr/>
+        </p:nvSpPr>
+        <p:spPr>
+          <a:xfrm>
+            <a:off x="1143000" y="4400550"/>
+            <a:ext cx="47625" cy="914400"/>
           </a:xfrm>
           <a:prstGeom prst="rect">
             <a:avLst/>
@@ -14213,14 +15208,44 @@
       </p:sp>
       <p:sp>
         <p:nvSpPr>
-          <p:cNvPr id="18" name="TextBox 17"/>
+          <p:cNvPr id="15" name="Oval 14"/>
+          <p:cNvSpPr/>
+          <p:nvPr/>
+        </p:nvSpPr>
+        <p:spPr>
+          <a:xfrm>
+            <a:off x="1428750" y="4648200"/>
+            <a:ext cx="419100" cy="419100"/>
+          </a:xfrm>
+          <a:prstGeom prst="ellipse">
+            <a:avLst/>
+          </a:prstGeom>
+          <a:solidFill>
+            <a:srgbClr val="0D2B5E"/>
+          </a:solidFill>
+          <a:ln>
+            <a:noFill/>
+          </a:ln>
+          <a:effectLst/>
+        </p:spPr>
+        <p:txBody>
+          <a:bodyPr rtlCol="0" anchor="ctr" wrap="square"/>
+          <a:lstStyle/>
+          <a:p>
+            <a:pPr algn="ctr"/>
+          </a:p>
+        </p:txBody>
+      </p:sp>
+      <p:sp>
+        <p:nvSpPr>
+          <p:cNvPr id="16" name="TextBox 15"/>
           <p:cNvSpPr txBox="1"/>
           <p:nvPr/>
         </p:nvSpPr>
         <p:spPr>
           <a:xfrm>
-            <a:off x="12192000" y="3638550"/>
-            <a:ext cx="590550" cy="400050"/>
+            <a:off x="1428750" y="4714875"/>
+            <a:ext cx="419100" cy="304800"/>
           </a:xfrm>
           <a:prstGeom prst="rect">
             <a:avLst/>
@@ -14233,35 +15258,35 @@
           </a:bodyPr>
           <a:lstStyle/>
           <a:p>
-            <a:pPr algn="r">
+            <a:pPr algn="ctr">
               <a:lnSpc>
                 <a:spcPct val="100000"/>
               </a:lnSpc>
             </a:pPr>
             <a:r>
-              <a:rPr sz="2550" b="1">
-                <a:solidFill>
-                  <a:srgbClr val="E4EBF4"/>
-                </a:solidFill>
-                <a:latin typeface="Pretendard"/>
-                <a:ea typeface="Pretendard"/>
-                <a:cs typeface="Pretendard"/>
-              </a:rPr>
-              <a:t>03</a:t>
-            </a:r>
-          </a:p>
-        </p:txBody>
-      </p:sp>
-      <p:sp>
-        <p:nvSpPr>
-          <p:cNvPr id="19" name="TextBox 18"/>
+              <a:rPr sz="1875" b="1">
+                <a:solidFill>
+                  <a:srgbClr val="FFFFFF"/>
+                </a:solidFill>
+                <a:latin typeface="Pretendard"/>
+                <a:ea typeface="Pretendard"/>
+                <a:cs typeface="Pretendard"/>
+              </a:rPr>
+              <a:t>2</a:t>
+            </a:r>
+          </a:p>
+        </p:txBody>
+      </p:sp>
+      <p:sp>
+        <p:nvSpPr>
+          <p:cNvPr id="17" name="TextBox 16"/>
           <p:cNvSpPr txBox="1"/>
           <p:nvPr/>
         </p:nvSpPr>
         <p:spPr>
           <a:xfrm>
-            <a:off x="9658350" y="3752850"/>
-            <a:ext cx="3067050" cy="1828800"/>
+            <a:off x="2057400" y="4495800"/>
+            <a:ext cx="14763750" cy="723900"/>
           </a:xfrm>
           <a:prstGeom prst="rect">
             <a:avLst/>
@@ -14276,11 +15301,11 @@
           <a:p>
             <a:pPr>
               <a:lnSpc>
-                <a:spcPct val="115000"/>
-              </a:lnSpc>
-            </a:pPr>
-            <a:r>
-              <a:rPr sz="2700" b="1">
+                <a:spcPct val="120000"/>
+              </a:lnSpc>
+            </a:pPr>
+            <a:r>
+              <a:rPr sz="2175" b="1">
                 <a:solidFill>
                   <a:srgbClr val="0D2B5E"/>
                 </a:solidFill>
@@ -14288,20 +15313,20 @@
                 <a:ea typeface="Pretendard"/>
                 <a:cs typeface="Pretendard"/>
               </a:rPr>
-              <a:t>실습 1H</a:t>
+              <a:t>컴팩션</a:t>
             </a:r>
           </a:p>
           <a:p>
             <a:pPr>
               <a:lnSpc>
-                <a:spcPct val="146000"/>
+                <a:spcPct val="130000"/>
               </a:lnSpc>
               <a:spcBef>
-                <a:spcPts val="1050"/>
+                <a:spcPts val="300"/>
               </a:spcBef>
             </a:pPr>
             <a:r>
-              <a:rPr sz="2025" b="0">
+              <a:rPr sz="1875" b="0">
                 <a:solidFill>
                   <a:srgbClr val="3D3D3D"/>
                 </a:solidFill>
@@ -14309,43 +15334,25 @@
                 <a:ea typeface="Pretendard"/>
                 <a:cs typeface="Pretendard"/>
               </a:rPr>
-              <a:t>Trino SQL 실습</a:t>
-            </a:r>
-          </a:p>
-          <a:p>
-            <a:pPr>
-              <a:lnSpc>
-                <a:spcPct val="146000"/>
-              </a:lnSpc>
-            </a:pPr>
-            <a:r>
-              <a:rPr sz="2025" b="0">
-                <a:solidFill>
-                  <a:srgbClr val="3D3D3D"/>
-                </a:solidFill>
-                <a:latin typeface="Pretendard"/>
-                <a:ea typeface="Pretendard"/>
-                <a:cs typeface="Pretendard"/>
-              </a:rPr>
-              <a:t>집계·CTAS·타임 트래블</a:t>
-            </a:r>
-          </a:p>
-        </p:txBody>
-      </p:sp>
-      <p:sp>
-        <p:nvSpPr>
-          <p:cNvPr id="20" name="Rounded Rectangle 19"/>
-          <p:cNvSpPr/>
-          <p:nvPr/>
-        </p:nvSpPr>
-        <p:spPr>
-          <a:xfrm>
-            <a:off x="13430250" y="3429000"/>
-            <a:ext cx="3714750" cy="2476500"/>
+              <a:t>CALL demo.system.rewrite_data_files 로 작은 파일을 합치고 files 메타테이블로 전후 비교</a:t>
+            </a:r>
+          </a:p>
+        </p:txBody>
+      </p:sp>
+      <p:sp>
+        <p:nvSpPr>
+          <p:cNvPr id="18" name="Rounded Rectangle 17"/>
+          <p:cNvSpPr/>
+          <p:nvPr/>
+        </p:nvSpPr>
+        <p:spPr>
+          <a:xfrm>
+            <a:off x="1143000" y="5448300"/>
+            <a:ext cx="16002000" cy="914400"/>
           </a:xfrm>
           <a:prstGeom prst="roundRect">
             <a:avLst>
-              <a:gd name="adj" fmla="val 1923"/>
+              <a:gd name="adj" fmla="val 5208"/>
             </a:avLst>
           </a:prstGeom>
           <a:solidFill>
@@ -14368,14 +15375,14 @@
       </p:sp>
       <p:sp>
         <p:nvSpPr>
-          <p:cNvPr id="21" name="Rectangle 20"/>
-          <p:cNvSpPr/>
-          <p:nvPr/>
-        </p:nvSpPr>
-        <p:spPr>
-          <a:xfrm>
-            <a:off x="13430250" y="3429000"/>
-            <a:ext cx="3714750" cy="47625"/>
+          <p:cNvPr id="19" name="Rectangle 18"/>
+          <p:cNvSpPr/>
+          <p:nvPr/>
+        </p:nvSpPr>
+        <p:spPr>
+          <a:xfrm>
+            <a:off x="1143000" y="5448300"/>
+            <a:ext cx="47625" cy="914400"/>
           </a:xfrm>
           <a:prstGeom prst="rect">
             <a:avLst/>
@@ -14398,14 +15405,44 @@
       </p:sp>
       <p:sp>
         <p:nvSpPr>
-          <p:cNvPr id="22" name="TextBox 21"/>
+          <p:cNvPr id="20" name="Oval 19"/>
+          <p:cNvSpPr/>
+          <p:nvPr/>
+        </p:nvSpPr>
+        <p:spPr>
+          <a:xfrm>
+            <a:off x="1428750" y="5695950"/>
+            <a:ext cx="419100" cy="419100"/>
+          </a:xfrm>
+          <a:prstGeom prst="ellipse">
+            <a:avLst/>
+          </a:prstGeom>
+          <a:solidFill>
+            <a:srgbClr val="0D2B5E"/>
+          </a:solidFill>
+          <a:ln>
+            <a:noFill/>
+          </a:ln>
+          <a:effectLst/>
+        </p:spPr>
+        <p:txBody>
+          <a:bodyPr rtlCol="0" anchor="ctr" wrap="square"/>
+          <a:lstStyle/>
+          <a:p>
+            <a:pPr algn="ctr"/>
+          </a:p>
+        </p:txBody>
+      </p:sp>
+      <p:sp>
+        <p:nvSpPr>
+          <p:cNvPr id="21" name="TextBox 20"/>
           <p:cNvSpPr txBox="1"/>
           <p:nvPr/>
         </p:nvSpPr>
         <p:spPr>
           <a:xfrm>
-            <a:off x="16287750" y="3638550"/>
-            <a:ext cx="590550" cy="400050"/>
+            <a:off x="1428750" y="5762625"/>
+            <a:ext cx="419100" cy="304800"/>
           </a:xfrm>
           <a:prstGeom prst="rect">
             <a:avLst/>
@@ -14418,35 +15455,35 @@
           </a:bodyPr>
           <a:lstStyle/>
           <a:p>
-            <a:pPr algn="r">
+            <a:pPr algn="ctr">
               <a:lnSpc>
                 <a:spcPct val="100000"/>
               </a:lnSpc>
             </a:pPr>
             <a:r>
-              <a:rPr sz="2550" b="1">
-                <a:solidFill>
-                  <a:srgbClr val="E4EBF4"/>
-                </a:solidFill>
-                <a:latin typeface="Pretendard"/>
-                <a:ea typeface="Pretendard"/>
-                <a:cs typeface="Pretendard"/>
-              </a:rPr>
-              <a:t>04</a:t>
-            </a:r>
-          </a:p>
-        </p:txBody>
-      </p:sp>
-      <p:sp>
-        <p:nvSpPr>
-          <p:cNvPr id="23" name="TextBox 22"/>
+              <a:rPr sz="1875" b="1">
+                <a:solidFill>
+                  <a:srgbClr val="FFFFFF"/>
+                </a:solidFill>
+                <a:latin typeface="Pretendard"/>
+                <a:ea typeface="Pretendard"/>
+                <a:cs typeface="Pretendard"/>
+              </a:rPr>
+              <a:t>3</a:t>
+            </a:r>
+          </a:p>
+        </p:txBody>
+      </p:sp>
+      <p:sp>
+        <p:nvSpPr>
+          <p:cNvPr id="22" name="TextBox 21"/>
           <p:cNvSpPr txBox="1"/>
           <p:nvPr/>
         </p:nvSpPr>
         <p:spPr>
           <a:xfrm>
-            <a:off x="13754100" y="3752850"/>
-            <a:ext cx="3067050" cy="1828800"/>
+            <a:off x="2057400" y="5543550"/>
+            <a:ext cx="14763750" cy="723900"/>
           </a:xfrm>
           <a:prstGeom prst="rect">
             <a:avLst/>
@@ -14461,11 +15498,11 @@
           <a:p>
             <a:pPr>
               <a:lnSpc>
-                <a:spcPct val="115000"/>
-              </a:lnSpc>
-            </a:pPr>
-            <a:r>
-              <a:rPr sz="2700" b="1">
+                <a:spcPct val="120000"/>
+              </a:lnSpc>
+            </a:pPr>
+            <a:r>
+              <a:rPr sz="2175" b="1">
                 <a:solidFill>
                   <a:srgbClr val="0D2B5E"/>
                 </a:solidFill>
@@ -14473,20 +15510,20 @@
                 <a:ea typeface="Pretendard"/>
                 <a:cs typeface="Pretendard"/>
               </a:rPr>
-              <a:t>정리 0.5H</a:t>
+              <a:t>날짜 경로</a:t>
             </a:r>
           </a:p>
           <a:p>
             <a:pPr>
               <a:lnSpc>
-                <a:spcPct val="146000"/>
+                <a:spcPct val="130000"/>
               </a:lnSpc>
               <a:spcBef>
-                <a:spcPts val="1050"/>
+                <a:spcPts val="300"/>
               </a:spcBef>
             </a:pPr>
             <a:r>
-              <a:rPr sz="2025" b="0">
+              <a:rPr sz="1875" b="0">
                 <a:solidFill>
                   <a:srgbClr val="3D3D3D"/>
                 </a:solidFill>
@@ -14494,26 +15531,42 @@
                 <a:ea typeface="Pretendard"/>
                 <a:cs typeface="Pretendard"/>
               </a:rPr>
-              <a:t>오늘 배운 것을</a:t>
-            </a:r>
-          </a:p>
-          <a:p>
-            <a:pPr>
-              <a:lnSpc>
-                <a:spcPct val="146000"/>
-              </a:lnSpc>
-            </a:pPr>
-            <a:r>
-              <a:rPr sz="2025" b="0">
-                <a:solidFill>
-                  <a:srgbClr val="3D3D3D"/>
-                </a:solidFill>
-                <a:latin typeface="Pretendard"/>
-                <a:ea typeface="Pretendard"/>
-                <a:cs typeface="Pretendard"/>
-              </a:rPr>
-              <a:t>한 장으로</a:t>
-            </a:r>
+              <a:t>랜딩 존을 dt=날짜 형태로 바꾸고 특정 날짜만 읽는 인자 추가</a:t>
+            </a:r>
+          </a:p>
+        </p:txBody>
+      </p:sp>
+      <p:sp>
+        <p:nvSpPr>
+          <p:cNvPr id="23" name="Rounded Rectangle 22"/>
+          <p:cNvSpPr/>
+          <p:nvPr/>
+        </p:nvSpPr>
+        <p:spPr>
+          <a:xfrm>
+            <a:off x="1143000" y="6496050"/>
+            <a:ext cx="16002000" cy="914400"/>
+          </a:xfrm>
+          <a:prstGeom prst="roundRect">
+            <a:avLst>
+              <a:gd name="adj" fmla="val 5208"/>
+            </a:avLst>
+          </a:prstGeom>
+          <a:solidFill>
+            <a:srgbClr val="FAFBFD"/>
+          </a:solidFill>
+          <a:ln w="9525">
+            <a:solidFill>
+              <a:srgbClr val="DCE1E8"/>
+            </a:solidFill>
+          </a:ln>
+          <a:effectLst/>
+        </p:spPr>
+        <p:txBody>
+          <a:bodyPr rtlCol="0" anchor="ctr" wrap="square"/>
+          <a:lstStyle/>
+          <a:p>
+            <a:pPr algn="ctr"/>
           </a:p>
         </p:txBody>
       </p:sp>
@@ -14526,7 +15579,7 @@
         <p:spPr>
           <a:xfrm>
             <a:off x="1143000" y="6496050"/>
-            <a:ext cx="47625" cy="723900"/>
+            <a:ext cx="47625" cy="914400"/>
           </a:xfrm>
           <a:prstGeom prst="rect">
             <a:avLst/>
@@ -14549,14 +15602,44 @@
       </p:sp>
       <p:sp>
         <p:nvSpPr>
-          <p:cNvPr id="25" name="TextBox 24"/>
+          <p:cNvPr id="25" name="Oval 24"/>
+          <p:cNvSpPr/>
+          <p:nvPr/>
+        </p:nvSpPr>
+        <p:spPr>
+          <a:xfrm>
+            <a:off x="1428750" y="6743700"/>
+            <a:ext cx="419100" cy="419100"/>
+          </a:xfrm>
+          <a:prstGeom prst="ellipse">
+            <a:avLst/>
+          </a:prstGeom>
+          <a:solidFill>
+            <a:srgbClr val="0D2B5E"/>
+          </a:solidFill>
+          <a:ln>
+            <a:noFill/>
+          </a:ln>
+          <a:effectLst/>
+        </p:spPr>
+        <p:txBody>
+          <a:bodyPr rtlCol="0" anchor="ctr" wrap="square"/>
+          <a:lstStyle/>
+          <a:p>
+            <a:pPr algn="ctr"/>
+          </a:p>
+        </p:txBody>
+      </p:sp>
+      <p:sp>
+        <p:nvSpPr>
+          <p:cNvPr id="26" name="TextBox 25"/>
           <p:cNvSpPr txBox="1"/>
           <p:nvPr/>
         </p:nvSpPr>
         <p:spPr>
           <a:xfrm>
-            <a:off x="1390650" y="6553200"/>
-            <a:ext cx="15754350" cy="762000"/>
+            <a:off x="1428750" y="6810375"/>
+            <a:ext cx="419100" cy="304800"/>
           </a:xfrm>
           <a:prstGeom prst="rect">
             <a:avLst/>
@@ -14569,28 +15652,90 @@
           </a:bodyPr>
           <a:lstStyle/>
           <a:p>
-            <a:pPr algn="l">
-              <a:lnSpc>
-                <a:spcPct val="150000"/>
-              </a:lnSpc>
-            </a:pPr>
-            <a:r>
-              <a:rPr sz="2025" b="1">
-                <a:solidFill>
-                  <a:srgbClr val="7D7D7D"/>
-                </a:solidFill>
-                <a:latin typeface="Pretendard"/>
-                <a:ea typeface="Pretendard"/>
-                <a:cs typeface="Pretendard"/>
-              </a:rPr>
-              <a:t>준비: 4개 컨테이너 up · orders 6행 확인 · 8080 포트 비우기 · docker pull trinodb/trino 미리</a:t>
-            </a:r>
-          </a:p>
-        </p:txBody>
-      </p:sp>
-      <p:sp>
-        <p:nvSpPr>
-          <p:cNvPr id="26" name="Rectangle 25"/>
+            <a:pPr algn="ctr">
+              <a:lnSpc>
+                <a:spcPct val="100000"/>
+              </a:lnSpc>
+            </a:pPr>
+            <a:r>
+              <a:rPr sz="1875" b="1">
+                <a:solidFill>
+                  <a:srgbClr val="FFFFFF"/>
+                </a:solidFill>
+                <a:latin typeface="Pretendard"/>
+                <a:ea typeface="Pretendard"/>
+                <a:cs typeface="Pretendard"/>
+              </a:rPr>
+              <a:t>4</a:t>
+            </a:r>
+          </a:p>
+        </p:txBody>
+      </p:sp>
+      <p:sp>
+        <p:nvSpPr>
+          <p:cNvPr id="27" name="TextBox 26"/>
+          <p:cNvSpPr txBox="1"/>
+          <p:nvPr/>
+        </p:nvSpPr>
+        <p:spPr>
+          <a:xfrm>
+            <a:off x="2057400" y="6591300"/>
+            <a:ext cx="14763750" cy="723900"/>
+          </a:xfrm>
+          <a:prstGeom prst="rect">
+            <a:avLst/>
+          </a:prstGeom>
+          <a:noFill/>
+        </p:spPr>
+        <p:txBody>
+          <a:bodyPr wrap="square" lIns="0" rIns="0" tIns="0" bIns="0" anchor="ctr">
+            <a:spAutoFit/>
+          </a:bodyPr>
+          <a:lstStyle/>
+          <a:p>
+            <a:pPr>
+              <a:lnSpc>
+                <a:spcPct val="120000"/>
+              </a:lnSpc>
+            </a:pPr>
+            <a:r>
+              <a:rPr sz="2175" b="1">
+                <a:solidFill>
+                  <a:srgbClr val="0D2B5E"/>
+                </a:solidFill>
+                <a:latin typeface="Pretendard"/>
+                <a:ea typeface="Pretendard"/>
+                <a:cs typeface="Pretendard"/>
+              </a:rPr>
+              <a:t>「최신」의 기준 바꾸기</a:t>
+            </a:r>
+          </a:p>
+          <a:p>
+            <a:pPr>
+              <a:lnSpc>
+                <a:spcPct val="130000"/>
+              </a:lnSpc>
+              <a:spcBef>
+                <a:spcPts val="300"/>
+              </a:spcBef>
+            </a:pPr>
+            <a:r>
+              <a:rPr sz="1875" b="0">
+                <a:solidFill>
+                  <a:srgbClr val="3D3D3D"/>
+                </a:solidFill>
+                <a:latin typeface="Pretendard"/>
+                <a:ea typeface="Pretendard"/>
+                <a:cs typeface="Pretendard"/>
+              </a:rPr>
+              <a:t>order_date 대신 파일 이름으로 바꾸면 결과가 어떻게 달라지는지</a:t>
+            </a:r>
+          </a:p>
+        </p:txBody>
+      </p:sp>
+      <p:sp>
+        <p:nvSpPr>
+          <p:cNvPr id="28" name="Rectangle 27"/>
           <p:cNvSpPr/>
           <p:nvPr/>
         </p:nvSpPr>
@@ -14620,7 +15765,7 @@
       </p:sp>
       <p:sp>
         <p:nvSpPr>
-          <p:cNvPr id="27" name="TextBox 26"/>
+          <p:cNvPr id="29" name="TextBox 28"/>
           <p:cNvSpPr txBox="1"/>
           <p:nvPr/>
         </p:nvSpPr>
@@ -14661,7 +15806,7 @@
       </p:sp>
       <p:sp>
         <p:nvSpPr>
-          <p:cNvPr id="28" name="TextBox 27"/>
+          <p:cNvPr id="30" name="TextBox 29"/>
           <p:cNvSpPr txBox="1"/>
           <p:nvPr/>
         </p:nvSpPr>
